--- a/A3-PS001-TC034_AIORI3_Presentation.pptx
+++ b/A3-PS001-TC034_AIORI3_Presentation.pptx
@@ -4,6 +4,9 @@
   <p:sldMasterIdLst>
     <p:sldMasterId id="2147483648" r:id="rId1"/>
   </p:sldMasterIdLst>
+  <p:notesMasterIdLst>
+    <p:notesMasterId r:id="rId13"/>
+  </p:notesMasterIdLst>
   <p:sldIdLst>
     <p:sldId id="256" r:id="rId2"/>
     <p:sldId id="257" r:id="rId3"/>
@@ -17,10 +20,7 @@
     <p:sldId id="265" r:id="rId11"/>
     <p:sldId id="266" r:id="rId12"/>
   </p:sldIdLst>
-  <p:notesMasterIdLst>
-    <p:notesMasterId r:id="rId13"/>
-  </p:notesMasterIdLst>
-  <p:sldSz cx="9144000" cy="5143500"/>
+  <p:sldSz cx="9144000" cy="5143500" type="screen16x9"/>
   <p:notesSz cx="5143500" cy="9144000"/>
   <p:defaultTextStyle>
     <a:lvl1pPr marL="0" algn="l" defTabSz="914400" rtl="0" eaLnBrk="1" latinLnBrk="0" hangingPunct="1">
@@ -114,6 +114,11 @@
       </a:defRPr>
     </a:lvl9pPr>
   </p:defaultTextStyle>
+  <p:extLst>
+    <p:ext uri="{EFAFB233-063F-42B5-8137-9DF3F51BA10A}">
+      <p15:sldGuideLst xmlns:p15="http://schemas.microsoft.com/office/powerpoint/2012/main"/>
+    </p:ext>
+  </p:extLst>
 </p:presentation>
 </file>
 
@@ -139,234 +144,10 @@
           <a:chExt cx="0" cy="0"/>
         </a:xfrm>
       </p:grpSpPr>
-      <p:sp>
-        <p:nvSpPr>
-          <p:cNvPr id="2" name="Header Placeholder 1"/>
-          <p:cNvSpPr>
-            <a:spLocks noGrp="1"/>
-          </p:cNvSpPr>
-          <p:nvPr>
-            <p:ph type="hdr" sz="quarter"/>
-          </p:nvPr>
-        </p:nvSpPr>
-        <p:spPr>
-          <a:xfrm>
-            <a:off x="0" y="0"/>
-            <a:ext cx="2971800" cy="458788"/>
-          </a:xfrm>
-          <a:prstGeom prst="rect">
-            <a:avLst/>
-          </a:prstGeom>
-        </p:spPr>
-        <p:txBody>
-          <a:bodyPr vert="horz" lIns="91440" tIns="45720" rIns="91440" bIns="45720" rtlCol="0"/>
-          <a:lstStyle>
-            <a:lvl1pPr algn="l">
-              <a:defRPr sz="1200"/>
-            </a:lvl1pPr>
-          </a:lstStyle>
-          <a:p>
-            <a:endParaRPr lang="en-US"/>
-          </a:p>
-        </p:txBody>
-      </p:sp>
-      <p:sp>
-        <p:nvSpPr>
-          <p:cNvPr id="3" name="Date Placeholder 2"/>
-          <p:cNvSpPr>
-            <a:spLocks noGrp="1"/>
-          </p:cNvSpPr>
-          <p:nvPr>
-            <p:ph type="dt" idx="1"/>
-          </p:nvPr>
-        </p:nvSpPr>
-        <p:spPr>
-          <a:xfrm>
-            <a:off x="3884613" y="0"/>
-            <a:ext cx="2971800" cy="458788"/>
-          </a:xfrm>
-          <a:prstGeom prst="rect">
-            <a:avLst/>
-          </a:prstGeom>
-        </p:spPr>
-        <p:txBody>
-          <a:bodyPr vert="horz" lIns="91440" tIns="45720" rIns="91440" bIns="45720" rtlCol="0"/>
-          <a:lstStyle>
-            <a:lvl1pPr algn="r">
-              <a:defRPr sz="1200"/>
-            </a:lvl1pPr>
-          </a:lstStyle>
-          <a:p>
-            <a:fld id="{5282F153-3F37-0F45-9E97-73ACFA13230C}" type="datetimeFigureOut">
-              <a:rPr lang="en-US"/>
-              <a:t>7/23/19</a:t>
-            </a:fld>
-            <a:endParaRPr lang="en-US"/>
-          </a:p>
-        </p:txBody>
-      </p:sp>
-      <p:sp>
-        <p:nvSpPr>
-          <p:cNvPr id="4" name="Slide Image Placeholder 3"/>
-          <p:cNvSpPr>
-            <a:spLocks noGrp="1" noRot="1" noChangeAspect="1"/>
-          </p:cNvSpPr>
-          <p:nvPr>
-            <p:ph type="sldImg" idx="2"/>
-          </p:nvPr>
-        </p:nvSpPr>
-        <p:spPr>
-          <a:xfrm>
-            <a:off x="685800" y="1143000"/>
-            <a:ext cx="5486400" cy="3086100"/>
-          </a:xfrm>
-          <a:prstGeom prst="rect">
-            <a:avLst/>
-          </a:prstGeom>
-          <a:noFill/>
-          <a:ln w="12700">
-            <a:solidFill>
-              <a:prstClr val="black"/>
-            </a:solidFill>
-          </a:ln>
-        </p:spPr>
-        <p:txBody>
-          <a:bodyPr vert="horz" lIns="91440" tIns="45720" rIns="91440" bIns="45720" rtlCol="0" anchor="ctr"/>
-          <a:lstStyle/>
-          <a:p>
-            <a:endParaRPr lang="en-US"/>
-          </a:p>
-        </p:txBody>
-      </p:sp>
-      <p:sp>
-        <p:nvSpPr>
-          <p:cNvPr id="5" name="Notes Placeholder 4"/>
-          <p:cNvSpPr>
-            <a:spLocks noGrp="1"/>
-          </p:cNvSpPr>
-          <p:nvPr>
-            <p:ph type="body" sz="quarter" idx="3"/>
-          </p:nvPr>
-        </p:nvSpPr>
-        <p:spPr>
-          <a:xfrm>
-            <a:off x="685800" y="4400550"/>
-            <a:ext cx="5486400" cy="3600450"/>
-          </a:xfrm>
-          <a:prstGeom prst="rect">
-            <a:avLst/>
-          </a:prstGeom>
-        </p:spPr>
-        <p:txBody>
-          <a:bodyPr vert="horz" lIns="91440" tIns="45720" rIns="91440" bIns="45720" rtlCol="0"/>
-          <a:lstStyle/>
-          <a:p>
-            <a:pPr lvl="0"/>
-            <a:r>
-              <a:rPr lang="en-US"/>
-              <a:t>Click to edit Master text styles</a:t>
-            </a:r>
-          </a:p>
-          <a:p>
-            <a:pPr lvl="1"/>
-            <a:r>
-              <a:rPr lang="en-US"/>
-              <a:t>Second level</a:t>
-            </a:r>
-          </a:p>
-          <a:p>
-            <a:pPr lvl="2"/>
-            <a:r>
-              <a:rPr lang="en-US"/>
-              <a:t>Third level</a:t>
-            </a:r>
-          </a:p>
-          <a:p>
-            <a:pPr lvl="3"/>
-            <a:r>
-              <a:rPr lang="en-US"/>
-              <a:t>Fourth level</a:t>
-            </a:r>
-          </a:p>
-          <a:p>
-            <a:pPr lvl="4"/>
-            <a:r>
-              <a:rPr lang="en-US"/>
-              <a:t>Fifth level</a:t>
-            </a:r>
-          </a:p>
-        </p:txBody>
-      </p:sp>
-      <p:sp>
-        <p:nvSpPr>
-          <p:cNvPr id="6" name="Footer Placeholder 5"/>
-          <p:cNvSpPr>
-            <a:spLocks noGrp="1"/>
-          </p:cNvSpPr>
-          <p:nvPr>
-            <p:ph type="ftr" sz="quarter" idx="4"/>
-          </p:nvPr>
-        </p:nvSpPr>
-        <p:spPr>
-          <a:xfrm>
-            <a:off x="0" y="8685213"/>
-            <a:ext cx="2971800" cy="458787"/>
-          </a:xfrm>
-          <a:prstGeom prst="rect">
-            <a:avLst/>
-          </a:prstGeom>
-        </p:spPr>
-        <p:txBody>
-          <a:bodyPr vert="horz" lIns="91440" tIns="45720" rIns="91440" bIns="45720" rtlCol="0" anchor="b"/>
-          <a:lstStyle>
-            <a:lvl1pPr algn="l">
-              <a:defRPr sz="1200"/>
-            </a:lvl1pPr>
-          </a:lstStyle>
-          <a:p>
-            <a:endParaRPr lang="en-US"/>
-          </a:p>
-        </p:txBody>
-      </p:sp>
-      <p:sp>
-        <p:nvSpPr>
-          <p:cNvPr id="7" name="Slide Number Placeholder 6"/>
-          <p:cNvSpPr>
-            <a:spLocks noGrp="1"/>
-          </p:cNvSpPr>
-          <p:nvPr>
-            <p:ph type="sldNum" sz="quarter" idx="5"/>
-          </p:nvPr>
-        </p:nvSpPr>
-        <p:spPr>
-          <a:xfrm>
-            <a:off x="3884613" y="8685213"/>
-            <a:ext cx="2971800" cy="458787"/>
-          </a:xfrm>
-          <a:prstGeom prst="rect">
-            <a:avLst/>
-          </a:prstGeom>
-        </p:spPr>
-        <p:txBody>
-          <a:bodyPr vert="horz" lIns="91440" tIns="45720" rIns="91440" bIns="45720" rtlCol="0" anchor="b"/>
-          <a:lstStyle>
-            <a:lvl1pPr algn="r">
-              <a:defRPr sz="1200"/>
-            </a:lvl1pPr>
-          </a:lstStyle>
-          <a:p>
-            <a:fld id="{CE5E9CC1-C706-0F49-92D6-E571CC5EEA8F}" type="slidenum">
-              <a:rPr lang="en-US"/>
-              <a:t>‹#›</a:t>
-            </a:fld>
-            <a:endParaRPr lang="en-US"/>
-          </a:p>
-        </p:txBody>
-      </p:sp>
     </p:spTree>
     <p:extLst>
       <p:ext uri="{BB962C8B-B14F-4D97-AF65-F5344CB8AC3E}">
-        <p14:creationId xmlns:p14="http://schemas.microsoft.com/office/powerpoint/2010/main" val="1024086991"/>
+        <p14:creationId xmlns:p14="http://schemas.microsoft.com/office/powerpoint/2010/main" val="241771719"/>
       </p:ext>
     </p:extLst>
   </p:cSld>
@@ -514,7 +295,6 @@
               <a:rPr lang="en-US" dirty="0"/>
               <a:t>Title slide. Team A3-PS001-TC034, PS-001: Android Ransomware-like Activity Early Warning in a Controlled Lab. Footer date uses the current date; edit if the submission date differs.</a:t>
             </a:r>
-            <a:endParaRPr lang="en-US" dirty="0"/>
           </a:p>
         </p:txBody>
       </p:sp>
@@ -602,7 +382,6 @@
               <a:rPr lang="en-US" dirty="0"/>
               <a:t>Reference [5] is cited for emulator setup. Papers [7] and [8] are the attached papers. [6], [9]-[12] were cited from the literature and should be re-verified (title, venue, pages) against the original sources before submission.</a:t>
             </a:r>
-            <a:endParaRPr lang="en-US" dirty="0"/>
           </a:p>
         </p:txBody>
       </p:sp>
@@ -686,10 +465,6 @@
           <a:bodyPr/>
           <a:lstStyle/>
           <a:p>
-            <a:r>
-              <a:rPr lang="en-US" dirty="0"/>
-              <a:t/>
-            </a:r>
             <a:endParaRPr lang="en-US" dirty="0"/>
           </a:p>
         </p:txBody>
@@ -778,7 +553,6 @@
               <a:rPr lang="en-US" dirty="0"/>
               <a:t>Source: PS-001 brief (Description, Challenge, Key Requirements). The scope boundaries mirror the PS-001 key requirements.</a:t>
             </a:r>
-            <a:endParaRPr lang="en-US" dirty="0"/>
           </a:p>
         </p:txBody>
       </p:sp>
@@ -866,7 +640,6 @@
               <a:rPr lang="en-US" dirty="0"/>
               <a:t>References: [1] Android security best practices (PS-001 reference); [2] FileObserver API reference; [3] Android data and file storage overview; [4] Linux inotify(7); [6] Scaife et al., CryptoLock, ICDCS 2016 (entropy, file type change, deletion and similarity indicators). Please re-check the exact FileObserver behaviour on the API level chosen for the emulator before the demo.</a:t>
             </a:r>
-            <a:endParaRPr lang="en-US" dirty="0"/>
           </a:p>
         </p:txBody>
       </p:sp>
@@ -954,7 +727,6 @@
               <a:rPr lang="en-US" dirty="0"/>
               <a:t>Figures for RansomTrack (0.96 accuracy, 9.1-9.2 s) are taken from the attached arXiv:2604.08739 paper and relate to Windows PE ransomware, not Android. Gagniuc (Algorithms 2026, 19, 345) is cited for architecture principles only. CryptoLock details should be re-verified against the original paper before final submission.</a:t>
             </a:r>
-            <a:endParaRPr lang="en-US" dirty="0"/>
           </a:p>
         </p:txBody>
       </p:sp>
@@ -1042,7 +814,6 @@
               <a:rPr lang="en-US" dirty="0"/>
               <a:t>Implemented vs planned: at the time of this proposal everything on this slide is DESIGNED, not implemented. Markov analysis is a stretch extension. Update the status chips (Designed -&gt; Built -&gt; Evaluated) as the prototype progresses. Platform note: FileObserver watches a single directory per instance, so sub-directories need their own observers.</a:t>
             </a:r>
-            <a:endParaRPr lang="en-US" dirty="0"/>
           </a:p>
         </p:txBody>
       </p:sp>
@@ -1130,7 +901,6 @@
               <a:rPr lang="en-US" dirty="0"/>
               <a:t>The 'before' column is our own baseline implementation (a fixed-threshold rule) and will be measured, not assumed. Threshold calibration idea (tune on clean data until false alerts stay below a stated limit; borderline scores trigger a second check) follows the layered-architecture discussion in Gagniuc 2026.</a:t>
             </a:r>
-            <a:endParaRPr lang="en-US" dirty="0"/>
           </a:p>
         </p:txBody>
       </p:sp>
@@ -1218,7 +988,6 @@
               <a:rPr lang="en-US" dirty="0"/>
               <a:t>Component diagram. The Detector Service only watches the harness's own test directory, which is what keeps the design within the PS-001 constraint of no monitoring of other apps on stock Android. The simulator runs in its own Android process so that Process.killProcess targets only that process.</a:t>
             </a:r>
-            <a:endParaRPr lang="en-US" dirty="0"/>
           </a:p>
         </p:txBody>
       </p:sp>
@@ -1306,7 +1075,6 @@
               <a:rPr lang="en-US" dirty="0"/>
               <a:t>Gane-Sarson style DFD: rounded rectangles = processes, open-ended bars = data stores, shaded rectangles = external entities. The amber dashed flow is the containment signal from P5 back to the simulator workload in P1's process; it never targets other apps. The dashed line is drawn from P5 upwards for clarity.</a:t>
             </a:r>
-            <a:endParaRPr lang="en-US" dirty="0"/>
           </a:p>
         </p:txBody>
       </p:sp>
@@ -1394,7 +1162,6 @@
               <a:rPr lang="en-US" dirty="0"/>
               <a:t>No calendar dates are given because the hackathon schedule is not stated in the attached PS-001 document; replace phases with dates once confirmed. All phases are currently Planned.</a:t>
             </a:r>
-            <a:endParaRPr lang="en-US" dirty="0"/>
           </a:p>
         </p:txBody>
       </p:sp>
@@ -1472,6 +1239,7 @@
         <a:solidFill>
           <a:srgbClr val="FFFFFF"/>
         </a:solidFill>
+        <a:effectLst/>
       </p:bgPr>
     </p:bg>
     <p:spTree>
@@ -1499,6 +1267,11 @@
 <file path=ppt/slideMasters/slideMaster1.xml><?xml version="1.0" encoding="utf-8"?>
 <p:sldMaster xmlns:a="http://schemas.openxmlformats.org/drawingml/2006/main" xmlns:r="http://schemas.openxmlformats.org/officeDocument/2006/relationships" xmlns:p="http://schemas.openxmlformats.org/presentationml/2006/main">
   <p:cSld>
+    <p:bg>
+      <p:bgRef idx="1001">
+        <a:schemeClr val="bg1"/>
+      </p:bgRef>
+    </p:bg>
     <p:spTree>
       <p:nvGrpSpPr>
         <p:cNvPr id="1" name=""/>
@@ -1793,21 +1566,21 @@
       </p:grpSpPr>
       <p:pic>
         <p:nvPicPr>
-          <p:cNvPr id="2" name="Image 0" descr="Advanced Internet Operations Research in India logo">    </p:cNvPr>
+          <p:cNvPr id="2" name="Image 0" descr="Advanced Internet Operations Research in India logo"/>
           <p:cNvPicPr>
             <a:picLocks noChangeAspect="1"/>
           </p:cNvPicPr>
           <p:nvPr/>
         </p:nvPicPr>
         <p:blipFill>
-          <a:blip r:embed="rId1"/>
+          <a:blip r:embed="rId3"/>
           <a:stretch>
             <a:fillRect/>
           </a:stretch>
         </p:blipFill>
         <p:spPr>
           <a:xfrm>
-            <a:off x="384048" y="365760"/>
+            <a:off x="341376" y="108356"/>
             <a:ext cx="822960" cy="816559"/>
           </a:xfrm>
           <a:prstGeom prst="rect">
@@ -1823,7 +1596,7 @@
         </p:nvSpPr>
         <p:spPr>
           <a:xfrm>
-            <a:off x="384048" y="2011680"/>
+            <a:off x="341376" y="938326"/>
             <a:ext cx="8229600" cy="640080"/>
           </a:xfrm>
           <a:prstGeom prst="rect">
@@ -1836,7 +1609,7 @@
           <a:bodyPr wrap="square" lIns="0" tIns="0" rIns="0" bIns="0" rtlCol="0" anchor="ctr"/>
           <a:lstStyle/>
           <a:p>
-            <a:pPr indent="0" marL="0">
+            <a:pPr marL="0" indent="0">
               <a:buNone/>
             </a:pPr>
             <a:r>
@@ -1862,7 +1635,7 @@
         </p:nvSpPr>
         <p:spPr>
           <a:xfrm>
-            <a:off x="384048" y="2670048"/>
+            <a:off x="341376" y="1535279"/>
             <a:ext cx="8229600" cy="411480"/>
           </a:xfrm>
           <a:prstGeom prst="rect">
@@ -1875,7 +1648,7 @@
           <a:bodyPr wrap="square" lIns="0" tIns="0" rIns="0" bIns="0" rtlCol="0" anchor="ctr"/>
           <a:lstStyle/>
           <a:p>
-            <a:pPr indent="0" marL="0">
+            <a:pPr marL="0" indent="0">
               <a:buNone/>
             </a:pPr>
             <a:r>
@@ -1901,8 +1674,8 @@
         </p:nvSpPr>
         <p:spPr>
           <a:xfrm>
-            <a:off x="384048" y="3383280"/>
-            <a:ext cx="8229600" cy="274320"/>
+            <a:off x="384048" y="2221079"/>
+            <a:ext cx="8229600" cy="1710841"/>
           </a:xfrm>
           <a:prstGeom prst="rect">
             <a:avLst/>
@@ -1914,7 +1687,7 @@
           <a:bodyPr wrap="square" lIns="0" tIns="0" rIns="0" bIns="0" rtlCol="0" anchor="ctr"/>
           <a:lstStyle/>
           <a:p>
-            <a:pPr indent="0" marL="0">
+            <a:pPr marL="0" indent="0">
               <a:buNone/>
             </a:pPr>
             <a:r>
@@ -1926,9 +1699,174 @@
                 <a:ea typeface="PT Sans" pitchFamily="34" charset="-122"/>
                 <a:cs typeface="PT Sans" pitchFamily="34" charset="-120"/>
               </a:rPr>
-              <a:t>Deepika Grace T T</a:t>
+              <a:t>Mentor :</a:t>
+            </a:r>
+            <a:br>
+              <a:rPr lang="en-US" sz="1400" b="1" dirty="0">
+                <a:solidFill>
+                  <a:srgbClr val="000000"/>
+                </a:solidFill>
+                <a:latin typeface="PT Sans" pitchFamily="34" charset="0"/>
+                <a:ea typeface="PT Sans" pitchFamily="34" charset="-122"/>
+                <a:cs typeface="PT Sans" pitchFamily="34" charset="-120"/>
+              </a:rPr>
+            </a:br>
+            <a:r>
+              <a:rPr lang="en-US" sz="1400" b="1" dirty="0">
+                <a:solidFill>
+                  <a:srgbClr val="000000"/>
+                </a:solidFill>
+                <a:latin typeface="PT Sans" pitchFamily="34" charset="0"/>
+                <a:ea typeface="PT Sans" pitchFamily="34" charset="-122"/>
+                <a:cs typeface="PT Sans" pitchFamily="34" charset="-120"/>
+              </a:rPr>
+              <a:t>Dr . Manu </a:t>
+            </a:r>
+            <a:r>
+              <a:rPr lang="en-US" sz="1400" b="1">
+                <a:solidFill>
+                  <a:srgbClr val="000000"/>
+                </a:solidFill>
+                <a:latin typeface="PT Sans" pitchFamily="34" charset="0"/>
+                <a:ea typeface="PT Sans" pitchFamily="34" charset="-122"/>
+                <a:cs typeface="PT Sans" pitchFamily="34" charset="-120"/>
+              </a:rPr>
+              <a:t>Elappila</a:t>
+            </a:r>
+            <a:r>
+              <a:rPr lang="en-US" sz="1400" b="1" dirty="0">
+                <a:solidFill>
+                  <a:srgbClr val="000000"/>
+                </a:solidFill>
+                <a:latin typeface="PT Sans" pitchFamily="34" charset="0"/>
+                <a:ea typeface="PT Sans" pitchFamily="34" charset="-122"/>
+                <a:cs typeface="PT Sans" pitchFamily="34" charset="-120"/>
+              </a:rPr>
+              <a:t> </a:t>
+            </a:r>
+          </a:p>
+          <a:p>
+            <a:r>
+              <a:rPr lang="en-GB" sz="1400" dirty="0">
+                <a:solidFill>
+                  <a:srgbClr val="000000"/>
+                </a:solidFill>
+                <a:latin typeface="PT Sans" pitchFamily="34" charset="0"/>
+                <a:ea typeface="PT Sans" pitchFamily="34" charset="-122"/>
+                <a:cs typeface="PT Sans" pitchFamily="34" charset="-120"/>
+                <a:hlinkClick r:id="rId4"/>
+              </a:rPr>
+              <a:t>manu.elappila@christuniversity.in</a:t>
+            </a:r>
+            <a:endParaRPr lang="en-GB" sz="1400" dirty="0">
+              <a:solidFill>
+                <a:srgbClr val="000000"/>
+              </a:solidFill>
+              <a:latin typeface="PT Sans" pitchFamily="34" charset="0"/>
+              <a:ea typeface="PT Sans" pitchFamily="34" charset="-122"/>
+              <a:cs typeface="PT Sans" pitchFamily="34" charset="-120"/>
+            </a:endParaRPr>
+          </a:p>
+          <a:p>
+            <a:r>
+              <a:rPr lang="en-GB" sz="1400" b="1" dirty="0">
+                <a:solidFill>
+                  <a:srgbClr val="000000"/>
+                </a:solidFill>
+                <a:latin typeface="PT Sans" pitchFamily="34" charset="0"/>
+                <a:ea typeface="PT Sans" pitchFamily="34" charset="-122"/>
+                <a:cs typeface="PT Sans" pitchFamily="34" charset="-120"/>
+              </a:rPr>
+              <a:t>Students:</a:t>
+            </a:r>
+            <a:endParaRPr lang="en-US" sz="1400" b="1" dirty="0">
+              <a:solidFill>
+                <a:srgbClr val="000000"/>
+              </a:solidFill>
+              <a:latin typeface="PT Sans" pitchFamily="34" charset="0"/>
+              <a:ea typeface="PT Sans" pitchFamily="34" charset="-122"/>
+              <a:cs typeface="PT Sans" pitchFamily="34" charset="-120"/>
+            </a:endParaRPr>
+          </a:p>
+          <a:p>
+            <a:pPr marL="0" indent="0">
+              <a:buNone/>
+            </a:pPr>
+            <a:r>
+              <a:rPr lang="en-US" sz="1400" b="1" dirty="0">
+                <a:solidFill>
+                  <a:srgbClr val="000000"/>
+                </a:solidFill>
+                <a:latin typeface="PT Sans" pitchFamily="34" charset="0"/>
+                <a:ea typeface="PT Sans" pitchFamily="34" charset="-122"/>
+                <a:cs typeface="PT Sans" pitchFamily="34" charset="-120"/>
+              </a:rPr>
+              <a:t>Deepika Grace T </a:t>
+            </a:r>
+            <a:r>
+              <a:rPr lang="en-US" sz="1400" b="1" dirty="0" err="1">
+                <a:solidFill>
+                  <a:srgbClr val="000000"/>
+                </a:solidFill>
+                <a:latin typeface="PT Sans" pitchFamily="34" charset="0"/>
+                <a:ea typeface="PT Sans" pitchFamily="34" charset="-122"/>
+                <a:cs typeface="PT Sans" pitchFamily="34" charset="-120"/>
+              </a:rPr>
+              <a:t>T</a:t>
+            </a:r>
+            <a:endParaRPr lang="en-US" sz="1400" b="1" dirty="0">
+              <a:solidFill>
+                <a:srgbClr val="000000"/>
+              </a:solidFill>
+              <a:latin typeface="PT Sans" pitchFamily="34" charset="0"/>
+              <a:ea typeface="PT Sans" pitchFamily="34" charset="-122"/>
+              <a:cs typeface="PT Sans" pitchFamily="34" charset="-120"/>
+            </a:endParaRPr>
+          </a:p>
+          <a:p>
+            <a:r>
+              <a:rPr lang="en-US" sz="1400" dirty="0">
+                <a:solidFill>
+                  <a:srgbClr val="000000"/>
+                </a:solidFill>
+                <a:latin typeface="PT Sans" pitchFamily="34" charset="0"/>
+                <a:ea typeface="PT Sans" pitchFamily="34" charset="-122"/>
+                <a:cs typeface="PT Sans" pitchFamily="34" charset="-120"/>
+              </a:rPr>
+              <a:t>deepika.grace@btech.christuniversity.in</a:t>
             </a:r>
             <a:endParaRPr lang="en-US" sz="1400" dirty="0"/>
+          </a:p>
+          <a:p>
+            <a:pPr marL="0" indent="0">
+              <a:buNone/>
+            </a:pPr>
+            <a:endParaRPr lang="en-US" sz="1400" b="1" dirty="0">
+              <a:solidFill>
+                <a:srgbClr val="000000"/>
+              </a:solidFill>
+              <a:latin typeface="PT Sans" pitchFamily="34" charset="0"/>
+            </a:endParaRPr>
+          </a:p>
+          <a:p>
+            <a:pPr marL="0" indent="0">
+              <a:buNone/>
+            </a:pPr>
+            <a:r>
+              <a:rPr lang="en-US" sz="1400" b="1" dirty="0">
+                <a:solidFill>
+                  <a:srgbClr val="000000"/>
+                </a:solidFill>
+                <a:latin typeface="PT Sans" pitchFamily="34" charset="0"/>
+              </a:rPr>
+              <a:t>Eliza Miriam Paul </a:t>
+            </a:r>
+          </a:p>
+          <a:p>
+            <a:r>
+              <a:rPr lang="en-US" sz="1400" dirty="0"/>
+              <a:t>eliza.miriam@btech.christuniversity.in</a:t>
+            </a:r>
           </a:p>
         </p:txBody>
       </p:sp>
@@ -1953,20 +1891,9 @@
           <a:bodyPr wrap="square" lIns="0" tIns="0" rIns="0" bIns="0" rtlCol="0" anchor="ctr"/>
           <a:lstStyle/>
           <a:p>
-            <a:pPr indent="0" marL="0">
-              <a:buNone/>
-            </a:pPr>
-            <a:r>
-              <a:rPr lang="en-US" sz="1400" b="1" dirty="0">
-                <a:solidFill>
-                  <a:srgbClr val="000000"/>
-                </a:solidFill>
-                <a:latin typeface="PT Sans" pitchFamily="34" charset="0"/>
-                <a:ea typeface="PT Sans" pitchFamily="34" charset="-122"/>
-                <a:cs typeface="PT Sans" pitchFamily="34" charset="-120"/>
-              </a:rPr>
-              <a:t>deepika.grace@btech.christuniversity.in</a:t>
-            </a:r>
+            <a:pPr marL="0" indent="0">
+              <a:buNone/>
+            </a:pPr>
             <a:endParaRPr lang="en-US" sz="1400" dirty="0"/>
           </a:p>
         </p:txBody>
@@ -1992,7 +1919,7 @@
           <a:bodyPr wrap="square" lIns="0" tIns="0" rIns="0" bIns="0" rtlCol="0" anchor="ctr"/>
           <a:lstStyle/>
           <a:p>
-            <a:pPr indent="0" marL="0">
+            <a:pPr marL="0" indent="0">
               <a:buNone/>
             </a:pPr>
             <a:r>
@@ -2031,7 +1958,7 @@
           <a:bodyPr wrap="square" lIns="0" tIns="0" rIns="0" bIns="0" rtlCol="0" anchor="ctr"/>
           <a:lstStyle/>
           <a:p>
-            <a:pPr indent="0" marL="0">
+            <a:pPr marL="0" indent="0">
               <a:buNone/>
             </a:pPr>
             <a:r>
@@ -2095,7 +2022,7 @@
           <a:bodyPr wrap="square" lIns="0" tIns="0" rIns="0" bIns="0" rtlCol="0" anchor="ctr"/>
           <a:lstStyle/>
           <a:p>
-            <a:pPr algn="ctr" indent="0" marL="0">
+            <a:pPr marL="0" indent="0" algn="ctr">
               <a:buNone/>
             </a:pPr>
             <a:r>
@@ -2107,21 +2034,7 @@
                 <a:ea typeface="PT Sans" pitchFamily="34" charset="-122"/>
                 <a:cs typeface="PT Sans" pitchFamily="34" charset="-120"/>
               </a:rPr>
-              <a:t>AIORI 3</a:t>
-            </a:r>
-            <a:pPr algn="ctr" indent="0" marL="0">
-              <a:buNone/>
-            </a:pPr>
-            <a:r>
-              <a:rPr lang="en-US" sz="750" b="1" dirty="0">
-                <a:solidFill>
-                  <a:srgbClr val="0000DC"/>
-                </a:solidFill>
-                <a:latin typeface="PT Sans" pitchFamily="34" charset="0"/>
-                <a:ea typeface="PT Sans" pitchFamily="34" charset="-122"/>
-                <a:cs typeface="PT Sans" pitchFamily="34" charset="-120"/>
-              </a:rPr>
-              <a:t>      Bibliography</a:t>
+              <a:t>AIORI 3      Bibliography</a:t>
             </a:r>
             <a:endParaRPr lang="en-US" sz="750" dirty="0"/>
           </a:p>
@@ -2148,7 +2061,7 @@
           <a:bodyPr wrap="square" lIns="0" tIns="0" rIns="0" bIns="0" rtlCol="0" anchor="ctr"/>
           <a:lstStyle/>
           <a:p>
-            <a:pPr indent="0" marL="0">
+            <a:pPr marL="0" indent="0">
               <a:buNone/>
             </a:pPr>
             <a:r>
@@ -2187,7 +2100,7 @@
           <a:bodyPr wrap="square" lIns="0" tIns="0" rIns="0" bIns="0" rtlCol="0" anchor="ctr"/>
           <a:lstStyle/>
           <a:p>
-            <a:pPr indent="0" marL="0">
+            <a:pPr marL="0" indent="0">
               <a:buNone/>
             </a:pPr>
             <a:r>
@@ -2201,9 +2114,6 @@
               </a:rPr>
               <a:t>D. Grace T T • </a:t>
             </a:r>
-            <a:pPr indent="0" marL="0">
-              <a:buNone/>
-            </a:pPr>
             <a:r>
               <a:rPr lang="en-US" sz="750" b="1" dirty="0">
                 <a:solidFill>
@@ -2215,9 +2125,6 @@
               </a:rPr>
               <a:t>A3-PS001-TC034</a:t>
             </a:r>
-            <a:pPr indent="0" marL="0">
-              <a:buNone/>
-            </a:pPr>
             <a:r>
               <a:rPr lang="en-US" sz="750" dirty="0">
                 <a:solidFill>
@@ -2254,7 +2161,7 @@
           <a:bodyPr wrap="square" lIns="0" tIns="0" rIns="0" bIns="0" rtlCol="0" anchor="ctr"/>
           <a:lstStyle/>
           <a:p>
-            <a:pPr algn="r" indent="0" marL="0">
+            <a:pPr marL="0" indent="0" algn="r">
               <a:buNone/>
             </a:pPr>
             <a:r>
@@ -2293,7 +2200,7 @@
           <a:bodyPr wrap="square" lIns="0" tIns="0" rIns="0" bIns="0" rtlCol="0" anchor="t"/>
           <a:lstStyle/>
           <a:p>
-            <a:pPr indent="0" marL="0">
+            <a:pPr marL="0" indent="0">
               <a:spcAft>
                 <a:spcPts val="300"/>
               </a:spcAft>
@@ -2313,7 +2220,7 @@
             <a:endParaRPr lang="en-US" sz="950" dirty="0"/>
           </a:p>
           <a:p>
-            <a:pPr indent="0" marL="0">
+            <a:pPr marL="0" indent="0">
               <a:spcAft>
                 <a:spcPts val="300"/>
               </a:spcAft>
@@ -2333,7 +2240,7 @@
             <a:endParaRPr lang="en-US" sz="950" dirty="0"/>
           </a:p>
           <a:p>
-            <a:pPr indent="0" marL="0">
+            <a:pPr marL="0" indent="0">
               <a:spcAft>
                 <a:spcPts val="300"/>
               </a:spcAft>
@@ -2353,7 +2260,7 @@
             <a:endParaRPr lang="en-US" sz="950" dirty="0"/>
           </a:p>
           <a:p>
-            <a:pPr indent="0" marL="0">
+            <a:pPr marL="0" indent="0">
               <a:spcAft>
                 <a:spcPts val="300"/>
               </a:spcAft>
@@ -2373,7 +2280,7 @@
             <a:endParaRPr lang="en-US" sz="950" dirty="0"/>
           </a:p>
           <a:p>
-            <a:pPr indent="0" marL="0">
+            <a:pPr marL="0" indent="0">
               <a:spcAft>
                 <a:spcPts val="300"/>
               </a:spcAft>
@@ -2393,7 +2300,7 @@
             <a:endParaRPr lang="en-US" sz="950" dirty="0"/>
           </a:p>
           <a:p>
-            <a:pPr indent="0" marL="0">
+            <a:pPr marL="0" indent="0">
               <a:spcAft>
                 <a:spcPts val="300"/>
               </a:spcAft>
@@ -2413,7 +2320,7 @@
             <a:endParaRPr lang="en-US" sz="950" dirty="0"/>
           </a:p>
           <a:p>
-            <a:pPr indent="0" marL="0">
+            <a:pPr marL="0" indent="0">
               <a:spcAft>
                 <a:spcPts val="300"/>
               </a:spcAft>
@@ -2433,7 +2340,7 @@
             <a:endParaRPr lang="en-US" sz="950" dirty="0"/>
           </a:p>
           <a:p>
-            <a:pPr indent="0" marL="0">
+            <a:pPr marL="0" indent="0">
               <a:spcAft>
                 <a:spcPts val="300"/>
               </a:spcAft>
@@ -2453,7 +2360,7 @@
             <a:endParaRPr lang="en-US" sz="950" dirty="0"/>
           </a:p>
           <a:p>
-            <a:pPr indent="0" marL="0">
+            <a:pPr marL="0" indent="0">
               <a:spcAft>
                 <a:spcPts val="300"/>
               </a:spcAft>
@@ -2473,7 +2380,7 @@
             <a:endParaRPr lang="en-US" sz="950" dirty="0"/>
           </a:p>
           <a:p>
-            <a:pPr indent="0" marL="0">
+            <a:pPr marL="0" indent="0">
               <a:spcAft>
                 <a:spcPts val="300"/>
               </a:spcAft>
@@ -2493,7 +2400,7 @@
             <a:endParaRPr lang="en-US" sz="950" dirty="0"/>
           </a:p>
           <a:p>
-            <a:pPr indent="0" marL="0">
+            <a:pPr marL="0" indent="0">
               <a:spcAft>
                 <a:spcPts val="300"/>
               </a:spcAft>
@@ -2513,7 +2420,7 @@
             <a:endParaRPr lang="en-US" sz="950" dirty="0"/>
           </a:p>
           <a:p>
-            <a:pPr indent="0" marL="0">
+            <a:pPr marL="0" indent="0">
               <a:spcAft>
                 <a:spcPts val="300"/>
               </a:spcAft>
@@ -2580,7 +2487,7 @@
           <a:bodyPr wrap="square" lIns="0" tIns="0" rIns="0" bIns="0" rtlCol="0" anchor="ctr"/>
           <a:lstStyle/>
           <a:p>
-            <a:pPr algn="ctr" indent="0" marL="0">
+            <a:pPr marL="0" indent="0" algn="ctr">
               <a:buNone/>
             </a:pPr>
             <a:r>
@@ -2644,7 +2551,7 @@
           <a:bodyPr wrap="square" lIns="0" tIns="0" rIns="0" bIns="0" rtlCol="0" anchor="ctr"/>
           <a:lstStyle/>
           <a:p>
-            <a:pPr algn="ctr" indent="0" marL="0">
+            <a:pPr marL="0" indent="0" algn="ctr">
               <a:buNone/>
             </a:pPr>
             <a:r>
@@ -2656,21 +2563,7 @@
                 <a:ea typeface="PT Sans" pitchFamily="34" charset="-122"/>
                 <a:cs typeface="PT Sans" pitchFamily="34" charset="-120"/>
               </a:rPr>
-              <a:t>AIORI 3</a:t>
-            </a:r>
-            <a:pPr algn="ctr" indent="0" marL="0">
-              <a:buNone/>
-            </a:pPr>
-            <a:r>
-              <a:rPr lang="en-US" sz="750" b="1" dirty="0">
-                <a:solidFill>
-                  <a:srgbClr val="0000DC"/>
-                </a:solidFill>
-                <a:latin typeface="PT Sans" pitchFamily="34" charset="0"/>
-                <a:ea typeface="PT Sans" pitchFamily="34" charset="-122"/>
-                <a:cs typeface="PT Sans" pitchFamily="34" charset="-120"/>
-              </a:rPr>
-              <a:t>      Abstract</a:t>
+              <a:t>AIORI 3      Abstract</a:t>
             </a:r>
             <a:endParaRPr lang="en-US" sz="750" dirty="0"/>
           </a:p>
@@ -2697,7 +2590,7 @@
           <a:bodyPr wrap="square" lIns="0" tIns="0" rIns="0" bIns="0" rtlCol="0" anchor="ctr"/>
           <a:lstStyle/>
           <a:p>
-            <a:pPr indent="0" marL="0">
+            <a:pPr marL="0" indent="0">
               <a:buNone/>
             </a:pPr>
             <a:r>
@@ -2736,7 +2629,7 @@
           <a:bodyPr wrap="square" lIns="0" tIns="0" rIns="0" bIns="0" rtlCol="0" anchor="t"/>
           <a:lstStyle/>
           <a:p>
-            <a:pPr indent="0" marL="0">
+            <a:pPr marL="0" indent="0">
               <a:buNone/>
             </a:pPr>
             <a:r>
@@ -2775,7 +2668,7 @@
           <a:bodyPr wrap="square" lIns="0" tIns="0" rIns="0" bIns="0" rtlCol="0" anchor="ctr"/>
           <a:lstStyle/>
           <a:p>
-            <a:pPr indent="0" marL="0">
+            <a:pPr marL="0" indent="0">
               <a:buNone/>
             </a:pPr>
             <a:r>
@@ -2789,9 +2682,6 @@
               </a:rPr>
               <a:t>D. Grace T T • </a:t>
             </a:r>
-            <a:pPr indent="0" marL="0">
-              <a:buNone/>
-            </a:pPr>
             <a:r>
               <a:rPr lang="en-US" sz="750" b="1" dirty="0">
                 <a:solidFill>
@@ -2803,9 +2693,6 @@
               </a:rPr>
               <a:t>A3-PS001-TC034</a:t>
             </a:r>
-            <a:pPr indent="0" marL="0">
-              <a:buNone/>
-            </a:pPr>
             <a:r>
               <a:rPr lang="en-US" sz="750" dirty="0">
                 <a:solidFill>
@@ -2842,7 +2729,7 @@
           <a:bodyPr wrap="square" lIns="0" tIns="0" rIns="0" bIns="0" rtlCol="0" anchor="ctr"/>
           <a:lstStyle/>
           <a:p>
-            <a:pPr algn="r" indent="0" marL="0">
+            <a:pPr marL="0" indent="0" algn="r">
               <a:buNone/>
             </a:pPr>
             <a:r>
@@ -3033,7 +2920,7 @@
           <a:bodyPr wrap="square" lIns="0" tIns="0" rIns="0" bIns="0" rtlCol="0" anchor="ctr"/>
           <a:lstStyle/>
           <a:p>
-            <a:pPr indent="0" marL="0">
+            <a:pPr marL="0" indent="0">
               <a:buNone/>
             </a:pPr>
             <a:r>
@@ -3178,7 +3065,7 @@
           <a:bodyPr wrap="square" lIns="0" tIns="0" rIns="0" bIns="0" rtlCol="0" anchor="ctr"/>
           <a:lstStyle/>
           <a:p>
-            <a:pPr indent="0" marL="0">
+            <a:pPr marL="0" indent="0">
               <a:buNone/>
             </a:pPr>
             <a:r>
@@ -3327,7 +3214,7 @@
           <a:bodyPr wrap="square" lIns="0" tIns="0" rIns="0" bIns="0" rtlCol="0" anchor="ctr"/>
           <a:lstStyle/>
           <a:p>
-            <a:pPr algn="ctr" indent="0" marL="0">
+            <a:pPr marL="0" indent="0" algn="ctr">
               <a:buNone/>
             </a:pPr>
             <a:r>
@@ -3339,21 +3226,7 @@
                 <a:ea typeface="PT Sans" pitchFamily="34" charset="-122"/>
                 <a:cs typeface="PT Sans" pitchFamily="34" charset="-120"/>
               </a:rPr>
-              <a:t>AIORI 3</a:t>
-            </a:r>
-            <a:pPr algn="ctr" indent="0" marL="0">
-              <a:buNone/>
-            </a:pPr>
-            <a:r>
-              <a:rPr lang="en-US" sz="750" b="1" dirty="0">
-                <a:solidFill>
-                  <a:srgbClr val="0000DC"/>
-                </a:solidFill>
-                <a:latin typeface="PT Sans" pitchFamily="34" charset="0"/>
-                <a:ea typeface="PT Sans" pitchFamily="34" charset="-122"/>
-                <a:cs typeface="PT Sans" pitchFamily="34" charset="-120"/>
-              </a:rPr>
-              <a:t>      Background</a:t>
+              <a:t>AIORI 3      Background</a:t>
             </a:r>
             <a:endParaRPr lang="en-US" sz="750" dirty="0"/>
           </a:p>
@@ -3380,7 +3253,7 @@
           <a:bodyPr wrap="square" lIns="0" tIns="0" rIns="0" bIns="0" rtlCol="0" anchor="ctr"/>
           <a:lstStyle/>
           <a:p>
-            <a:pPr indent="0" marL="0">
+            <a:pPr marL="0" indent="0">
               <a:buNone/>
             </a:pPr>
             <a:r>
@@ -3419,7 +3292,7 @@
           <a:bodyPr wrap="square" lIns="0" tIns="0" rIns="0" bIns="0" rtlCol="0" anchor="t"/>
           <a:lstStyle/>
           <a:p>
-            <a:pPr indent="0" marL="0">
+            <a:pPr marL="0" indent="0">
               <a:buNone/>
             </a:pPr>
             <a:r>
@@ -3458,7 +3331,7 @@
           <a:bodyPr wrap="square" lIns="0" tIns="0" rIns="0" bIns="0" rtlCol="0" anchor="ctr"/>
           <a:lstStyle/>
           <a:p>
-            <a:pPr indent="0" marL="0">
+            <a:pPr marL="0" indent="0">
               <a:buNone/>
             </a:pPr>
             <a:r>
@@ -3472,9 +3345,6 @@
               </a:rPr>
               <a:t>D. Grace T T • </a:t>
             </a:r>
-            <a:pPr indent="0" marL="0">
-              <a:buNone/>
-            </a:pPr>
             <a:r>
               <a:rPr lang="en-US" sz="750" b="1" dirty="0">
                 <a:solidFill>
@@ -3486,9 +3356,6 @@
               </a:rPr>
               <a:t>A3-PS001-TC034</a:t>
             </a:r>
-            <a:pPr indent="0" marL="0">
-              <a:buNone/>
-            </a:pPr>
             <a:r>
               <a:rPr lang="en-US" sz="750" dirty="0">
                 <a:solidFill>
@@ -3525,7 +3392,7 @@
           <a:bodyPr wrap="square" lIns="0" tIns="0" rIns="0" bIns="0" rtlCol="0" anchor="ctr"/>
           <a:lstStyle/>
           <a:p>
-            <a:pPr algn="r" indent="0" marL="0">
+            <a:pPr marL="0" indent="0" algn="r">
               <a:buNone/>
             </a:pPr>
             <a:r>
@@ -3614,7 +3481,7 @@
           <a:bodyPr wrap="square" lIns="0" tIns="0" rIns="0" bIns="0" rtlCol="0" anchor="ctr"/>
           <a:lstStyle/>
           <a:p>
-            <a:pPr algn="ctr" indent="0" marL="0">
+            <a:pPr marL="0" indent="0" algn="ctr">
               <a:buNone/>
             </a:pPr>
             <a:r>
@@ -3653,7 +3520,7 @@
           <a:bodyPr wrap="square" lIns="0" tIns="0" rIns="0" bIns="0" rtlCol="0" anchor="ctr"/>
           <a:lstStyle/>
           <a:p>
-            <a:pPr indent="0" marL="0">
+            <a:pPr marL="0" indent="0">
               <a:buNone/>
             </a:pPr>
             <a:r>
@@ -3848,7 +3715,7 @@
           <a:bodyPr wrap="square" lIns="0" tIns="0" rIns="0" bIns="0" rtlCol="0" anchor="ctr"/>
           <a:lstStyle/>
           <a:p>
-            <a:pPr algn="ctr" indent="0" marL="0">
+            <a:pPr marL="0" indent="0" algn="ctr">
               <a:buNone/>
             </a:pPr>
             <a:r>
@@ -3887,7 +3754,7 @@
           <a:bodyPr wrap="square" lIns="0" tIns="0" rIns="0" bIns="0" rtlCol="0" anchor="ctr"/>
           <a:lstStyle/>
           <a:p>
-            <a:pPr indent="0" marL="0">
+            <a:pPr marL="0" indent="0">
               <a:buNone/>
             </a:pPr>
             <a:r>
@@ -4082,7 +3949,7 @@
           <a:bodyPr wrap="square" lIns="0" tIns="0" rIns="0" bIns="0" rtlCol="0" anchor="ctr"/>
           <a:lstStyle/>
           <a:p>
-            <a:pPr algn="ctr" indent="0" marL="0">
+            <a:pPr marL="0" indent="0" algn="ctr">
               <a:buNone/>
             </a:pPr>
             <a:r>
@@ -4121,7 +3988,7 @@
           <a:bodyPr wrap="square" lIns="0" tIns="0" rIns="0" bIns="0" rtlCol="0" anchor="ctr"/>
           <a:lstStyle/>
           <a:p>
-            <a:pPr indent="0" marL="0">
+            <a:pPr marL="0" indent="0">
               <a:buNone/>
             </a:pPr>
             <a:r>
@@ -4291,7 +4158,7 @@
           <a:bodyPr wrap="square" lIns="0" tIns="0" rIns="0" bIns="0" rtlCol="0" anchor="ctr"/>
           <a:lstStyle/>
           <a:p>
-            <a:pPr indent="0" marL="0">
+            <a:pPr marL="0" indent="0">
               <a:buNone/>
             </a:pPr>
             <a:r>
@@ -4355,7 +4222,7 @@
           <a:bodyPr wrap="square" lIns="0" tIns="0" rIns="0" bIns="0" rtlCol="0" anchor="ctr"/>
           <a:lstStyle/>
           <a:p>
-            <a:pPr algn="ctr" indent="0" marL="0">
+            <a:pPr marL="0" indent="0" algn="ctr">
               <a:buNone/>
             </a:pPr>
             <a:r>
@@ -4367,21 +4234,7 @@
                 <a:ea typeface="PT Sans" pitchFamily="34" charset="-122"/>
                 <a:cs typeface="PT Sans" pitchFamily="34" charset="-120"/>
               </a:rPr>
-              <a:t>AIORI 3</a:t>
-            </a:r>
-            <a:pPr algn="ctr" indent="0" marL="0">
-              <a:buNone/>
-            </a:pPr>
-            <a:r>
-              <a:rPr lang="en-US" sz="750" b="1" dirty="0">
-                <a:solidFill>
-                  <a:srgbClr val="0000DC"/>
-                </a:solidFill>
-                <a:latin typeface="PT Sans" pitchFamily="34" charset="0"/>
-                <a:ea typeface="PT Sans" pitchFamily="34" charset="-122"/>
-                <a:cs typeface="PT Sans" pitchFamily="34" charset="-120"/>
-              </a:rPr>
-              <a:t>      Literature &amp; RFC Review</a:t>
+              <a:t>AIORI 3      Literature &amp; RFC Review</a:t>
             </a:r>
             <a:endParaRPr lang="en-US" sz="750" dirty="0"/>
           </a:p>
@@ -4408,7 +4261,7 @@
           <a:bodyPr wrap="square" lIns="0" tIns="0" rIns="0" bIns="0" rtlCol="0" anchor="ctr"/>
           <a:lstStyle/>
           <a:p>
-            <a:pPr indent="0" marL="0">
+            <a:pPr marL="0" indent="0">
               <a:buNone/>
             </a:pPr>
             <a:r>
@@ -4447,7 +4300,7 @@
           <a:bodyPr wrap="square" lIns="0" tIns="0" rIns="0" bIns="0" rtlCol="0" anchor="t"/>
           <a:lstStyle/>
           <a:p>
-            <a:pPr indent="0" marL="0">
+            <a:pPr marL="0" indent="0">
               <a:buNone/>
             </a:pPr>
             <a:r>
@@ -4486,7 +4339,7 @@
           <a:bodyPr wrap="square" lIns="0" tIns="0" rIns="0" bIns="0" rtlCol="0" anchor="ctr"/>
           <a:lstStyle/>
           <a:p>
-            <a:pPr indent="0" marL="0">
+            <a:pPr marL="0" indent="0">
               <a:buNone/>
             </a:pPr>
             <a:r>
@@ -4500,9 +4353,6 @@
               </a:rPr>
               <a:t>D. Grace T T • </a:t>
             </a:r>
-            <a:pPr indent="0" marL="0">
-              <a:buNone/>
-            </a:pPr>
             <a:r>
               <a:rPr lang="en-US" sz="750" b="1" dirty="0">
                 <a:solidFill>
@@ -4514,9 +4364,6 @@
               </a:rPr>
               <a:t>A3-PS001-TC034</a:t>
             </a:r>
-            <a:pPr indent="0" marL="0">
-              <a:buNone/>
-            </a:pPr>
             <a:r>
               <a:rPr lang="en-US" sz="750" dirty="0">
                 <a:solidFill>
@@ -4553,7 +4400,7 @@
           <a:bodyPr wrap="square" lIns="0" tIns="0" rIns="0" bIns="0" rtlCol="0" anchor="ctr"/>
           <a:lstStyle/>
           <a:p>
-            <a:pPr algn="r" indent="0" marL="0">
+            <a:pPr marL="0" indent="0" algn="r">
               <a:buNone/>
             </a:pPr>
             <a:r>
@@ -4573,7 +4420,7 @@
       </p:sp>
       <p:graphicFrame>
         <p:nvGraphicFramePr>
-          <p:cNvPr id="5" name="Literature table"/>
+          <p:cNvPr id="7" name="Literature table"/>
           <p:cNvGraphicFramePr>
             <a:graphicFrameLocks noGrp="1"/>
           </p:cNvGraphicFramePr>
@@ -4587,16 +4434,34 @@
         </p:nvGraphicFramePr>
         <p:xfrm>
           <a:off x="457200" y="1280160"/>
-          <a:ext cx="8229600" cy="914400"/>
+          <a:ext cx="8229600" cy="2403348"/>
         </p:xfrm>
         <a:graphic>
           <a:graphicData uri="http://schemas.openxmlformats.org/drawingml/2006/table">
             <a:tbl>
               <a:tblPr/>
               <a:tblGrid>
-                <a:gridCol w="1920240"/>
-                <a:gridCol w="3200400"/>
-                <a:gridCol w="3108960"/>
+                <a:gridCol w="1920240">
+                  <a:extLst>
+                    <a:ext uri="{9D8B030D-6E8A-4147-A177-3AD203B41FA5}">
+                      <a16:colId xmlns:a16="http://schemas.microsoft.com/office/drawing/2014/main" val="20000"/>
+                    </a:ext>
+                  </a:extLst>
+                </a:gridCol>
+                <a:gridCol w="3200400">
+                  <a:extLst>
+                    <a:ext uri="{9D8B030D-6E8A-4147-A177-3AD203B41FA5}">
+                      <a16:colId xmlns:a16="http://schemas.microsoft.com/office/drawing/2014/main" val="20001"/>
+                    </a:ext>
+                  </a:extLst>
+                </a:gridCol>
+                <a:gridCol w="3108960">
+                  <a:extLst>
+                    <a:ext uri="{9D8B030D-6E8A-4147-A177-3AD203B41FA5}">
+                      <a16:colId xmlns:a16="http://schemas.microsoft.com/office/drawing/2014/main" val="20002"/>
+                    </a:ext>
+                  </a:extLst>
+                </a:gridCol>
               </a:tblGrid>
               <a:tr h="0">
                 <a:tc>
@@ -4604,7 +4469,7 @@
                     <a:bodyPr/>
                     <a:lstStyle/>
                     <a:p>
-                      <a:pPr indent="0" marL="0">
+                      <a:pPr marL="0" indent="0">
                         <a:buNone/>
                       </a:pPr>
                       <a:r>
@@ -4672,7 +4537,7 @@
                     <a:bodyPr/>
                     <a:lstStyle/>
                     <a:p>
-                      <a:pPr indent="0" marL="0">
+                      <a:pPr marL="0" indent="0">
                         <a:buNone/>
                       </a:pPr>
                       <a:r>
@@ -4740,7 +4605,7 @@
                     <a:bodyPr/>
                     <a:lstStyle/>
                     <a:p>
-                      <a:pPr indent="0" marL="0">
+                      <a:pPr marL="0" indent="0">
                         <a:buNone/>
                       </a:pPr>
                       <a:r>
@@ -4803,6 +4668,11 @@
                     </a:solidFill>
                   </a:tcPr>
                 </a:tc>
+                <a:extLst>
+                  <a:ext uri="{0D108BD9-81ED-4DB2-BD59-A6C34878D82A}">
+                    <a16:rowId xmlns:a16="http://schemas.microsoft.com/office/drawing/2014/main" val="10000"/>
+                  </a:ext>
+                </a:extLst>
               </a:tr>
               <a:tr h="0">
                 <a:tc>
@@ -4810,7 +4680,7 @@
                     <a:bodyPr/>
                     <a:lstStyle/>
                     <a:p>
-                      <a:pPr indent="0" marL="0">
+                      <a:pPr marL="0" indent="0">
                         <a:buNone/>
                       </a:pPr>
                       <a:r>
@@ -4878,7 +4748,7 @@
                     <a:bodyPr/>
                     <a:lstStyle/>
                     <a:p>
-                      <a:pPr indent="0" marL="0">
+                      <a:pPr marL="0" indent="0">
                         <a:buNone/>
                       </a:pPr>
                       <a:r>
@@ -4946,7 +4816,7 @@
                     <a:bodyPr/>
                     <a:lstStyle/>
                     <a:p>
-                      <a:pPr indent="0" marL="0">
+                      <a:pPr marL="0" indent="0">
                         <a:buNone/>
                       </a:pPr>
                       <a:r>
@@ -5009,6 +4879,11 @@
                     </a:solidFill>
                   </a:tcPr>
                 </a:tc>
+                <a:extLst>
+                  <a:ext uri="{0D108BD9-81ED-4DB2-BD59-A6C34878D82A}">
+                    <a16:rowId xmlns:a16="http://schemas.microsoft.com/office/drawing/2014/main" val="10001"/>
+                  </a:ext>
+                </a:extLst>
               </a:tr>
               <a:tr h="0">
                 <a:tc>
@@ -5016,7 +4891,7 @@
                     <a:bodyPr/>
                     <a:lstStyle/>
                     <a:p>
-                      <a:pPr indent="0" marL="0">
+                      <a:pPr marL="0" indent="0">
                         <a:buNone/>
                       </a:pPr>
                       <a:r>
@@ -5084,7 +4959,7 @@
                     <a:bodyPr/>
                     <a:lstStyle/>
                     <a:p>
-                      <a:pPr indent="0" marL="0">
+                      <a:pPr marL="0" indent="0">
                         <a:buNone/>
                       </a:pPr>
                       <a:r>
@@ -5152,7 +5027,7 @@
                     <a:bodyPr/>
                     <a:lstStyle/>
                     <a:p>
-                      <a:pPr indent="0" marL="0">
+                      <a:pPr marL="0" indent="0">
                         <a:buNone/>
                       </a:pPr>
                       <a:r>
@@ -5215,6 +5090,11 @@
                     </a:solidFill>
                   </a:tcPr>
                 </a:tc>
+                <a:extLst>
+                  <a:ext uri="{0D108BD9-81ED-4DB2-BD59-A6C34878D82A}">
+                    <a16:rowId xmlns:a16="http://schemas.microsoft.com/office/drawing/2014/main" val="10002"/>
+                  </a:ext>
+                </a:extLst>
               </a:tr>
               <a:tr h="0">
                 <a:tc>
@@ -5222,7 +5102,7 @@
                     <a:bodyPr/>
                     <a:lstStyle/>
                     <a:p>
-                      <a:pPr indent="0" marL="0">
+                      <a:pPr marL="0" indent="0">
                         <a:buNone/>
                       </a:pPr>
                       <a:r>
@@ -5290,7 +5170,7 @@
                     <a:bodyPr/>
                     <a:lstStyle/>
                     <a:p>
-                      <a:pPr indent="0" marL="0">
+                      <a:pPr marL="0" indent="0">
                         <a:buNone/>
                       </a:pPr>
                       <a:r>
@@ -5358,7 +5238,7 @@
                     <a:bodyPr/>
                     <a:lstStyle/>
                     <a:p>
-                      <a:pPr indent="0" marL="0">
+                      <a:pPr marL="0" indent="0">
                         <a:buNone/>
                       </a:pPr>
                       <a:r>
@@ -5421,6 +5301,11 @@
                     </a:solidFill>
                   </a:tcPr>
                 </a:tc>
+                <a:extLst>
+                  <a:ext uri="{0D108BD9-81ED-4DB2-BD59-A6C34878D82A}">
+                    <a16:rowId xmlns:a16="http://schemas.microsoft.com/office/drawing/2014/main" val="10003"/>
+                  </a:ext>
+                </a:extLst>
               </a:tr>
               <a:tr h="0">
                 <a:tc>
@@ -5428,7 +5313,7 @@
                     <a:bodyPr/>
                     <a:lstStyle/>
                     <a:p>
-                      <a:pPr indent="0" marL="0">
+                      <a:pPr marL="0" indent="0">
                         <a:buNone/>
                       </a:pPr>
                       <a:r>
@@ -5496,7 +5381,7 @@
                     <a:bodyPr/>
                     <a:lstStyle/>
                     <a:p>
-                      <a:pPr indent="0" marL="0">
+                      <a:pPr marL="0" indent="0">
                         <a:buNone/>
                       </a:pPr>
                       <a:r>
@@ -5564,7 +5449,7 @@
                     <a:bodyPr/>
                     <a:lstStyle/>
                     <a:p>
-                      <a:pPr indent="0" marL="0">
+                      <a:pPr marL="0" indent="0">
                         <a:buNone/>
                       </a:pPr>
                       <a:r>
@@ -5627,6 +5512,11 @@
                     </a:solidFill>
                   </a:tcPr>
                 </a:tc>
+                <a:extLst>
+                  <a:ext uri="{0D108BD9-81ED-4DB2-BD59-A6C34878D82A}">
+                    <a16:rowId xmlns:a16="http://schemas.microsoft.com/office/drawing/2014/main" val="10004"/>
+                  </a:ext>
+                </a:extLst>
               </a:tr>
               <a:tr h="0">
                 <a:tc>
@@ -5634,7 +5524,7 @@
                     <a:bodyPr/>
                     <a:lstStyle/>
                     <a:p>
-                      <a:pPr indent="0" marL="0">
+                      <a:pPr marL="0" indent="0">
                         <a:buNone/>
                       </a:pPr>
                       <a:r>
@@ -5702,7 +5592,7 @@
                     <a:bodyPr/>
                     <a:lstStyle/>
                     <a:p>
-                      <a:pPr indent="0" marL="0">
+                      <a:pPr marL="0" indent="0">
                         <a:buNone/>
                       </a:pPr>
                       <a:r>
@@ -5770,7 +5660,7 @@
                     <a:bodyPr/>
                     <a:lstStyle/>
                     <a:p>
-                      <a:pPr indent="0" marL="0">
+                      <a:pPr marL="0" indent="0">
                         <a:buNone/>
                       </a:pPr>
                       <a:r>
@@ -5833,6 +5723,11 @@
                     </a:solidFill>
                   </a:tcPr>
                 </a:tc>
+                <a:extLst>
+                  <a:ext uri="{0D108BD9-81ED-4DB2-BD59-A6C34878D82A}">
+                    <a16:rowId xmlns:a16="http://schemas.microsoft.com/office/drawing/2014/main" val="10005"/>
+                  </a:ext>
+                </a:extLst>
               </a:tr>
             </a:tbl>
           </a:graphicData>
@@ -5859,7 +5754,7 @@
           <a:bodyPr wrap="square" lIns="0" tIns="0" rIns="0" bIns="0" rtlCol="0" anchor="ctr"/>
           <a:lstStyle/>
           <a:p>
-            <a:pPr indent="0" marL="0">
+            <a:pPr marL="0" indent="0">
               <a:buNone/>
             </a:pPr>
             <a:r>
@@ -5923,7 +5818,7 @@
           <a:bodyPr wrap="square" lIns="0" tIns="0" rIns="0" bIns="0" rtlCol="0" anchor="ctr"/>
           <a:lstStyle/>
           <a:p>
-            <a:pPr algn="ctr" indent="0" marL="0">
+            <a:pPr marL="0" indent="0" algn="ctr">
               <a:buNone/>
             </a:pPr>
             <a:r>
@@ -5935,21 +5830,7 @@
                 <a:ea typeface="PT Sans" pitchFamily="34" charset="-122"/>
                 <a:cs typeface="PT Sans" pitchFamily="34" charset="-120"/>
               </a:rPr>
-              <a:t>AIORI 3</a:t>
-            </a:r>
-            <a:pPr algn="ctr" indent="0" marL="0">
-              <a:buNone/>
-            </a:pPr>
-            <a:r>
-              <a:rPr lang="en-US" sz="750" b="1" dirty="0">
-                <a:solidFill>
-                  <a:srgbClr val="0000DC"/>
-                </a:solidFill>
-                <a:latin typeface="PT Sans" pitchFamily="34" charset="0"/>
-                <a:ea typeface="PT Sans" pitchFamily="34" charset="-122"/>
-                <a:cs typeface="PT Sans" pitchFamily="34" charset="-120"/>
-              </a:rPr>
-              <a:t>      Proposed Solution</a:t>
+              <a:t>AIORI 3      Proposed Solution</a:t>
             </a:r>
             <a:endParaRPr lang="en-US" sz="750" dirty="0"/>
           </a:p>
@@ -5976,7 +5857,7 @@
           <a:bodyPr wrap="square" lIns="0" tIns="0" rIns="0" bIns="0" rtlCol="0" anchor="ctr"/>
           <a:lstStyle/>
           <a:p>
-            <a:pPr indent="0" marL="0">
+            <a:pPr marL="0" indent="0">
               <a:buNone/>
             </a:pPr>
             <a:r>
@@ -6015,7 +5896,7 @@
           <a:bodyPr wrap="square" lIns="0" tIns="0" rIns="0" bIns="0" rtlCol="0" anchor="t"/>
           <a:lstStyle/>
           <a:p>
-            <a:pPr indent="0" marL="0">
+            <a:pPr marL="0" indent="0">
               <a:buNone/>
             </a:pPr>
             <a:r>
@@ -6054,7 +5935,7 @@
           <a:bodyPr wrap="square" lIns="0" tIns="0" rIns="0" bIns="0" rtlCol="0" anchor="ctr"/>
           <a:lstStyle/>
           <a:p>
-            <a:pPr indent="0" marL="0">
+            <a:pPr marL="0" indent="0">
               <a:buNone/>
             </a:pPr>
             <a:r>
@@ -6068,9 +5949,6 @@
               </a:rPr>
               <a:t>D. Grace T T • </a:t>
             </a:r>
-            <a:pPr indent="0" marL="0">
-              <a:buNone/>
-            </a:pPr>
             <a:r>
               <a:rPr lang="en-US" sz="750" b="1" dirty="0">
                 <a:solidFill>
@@ -6082,9 +5960,6 @@
               </a:rPr>
               <a:t>A3-PS001-TC034</a:t>
             </a:r>
-            <a:pPr indent="0" marL="0">
-              <a:buNone/>
-            </a:pPr>
             <a:r>
               <a:rPr lang="en-US" sz="750" dirty="0">
                 <a:solidFill>
@@ -6121,7 +5996,7 @@
           <a:bodyPr wrap="square" lIns="0" tIns="0" rIns="0" bIns="0" rtlCol="0" anchor="ctr"/>
           <a:lstStyle/>
           <a:p>
-            <a:pPr algn="r" indent="0" marL="0">
+            <a:pPr marL="0" indent="0" algn="r">
               <a:buNone/>
             </a:pPr>
             <a:r>
@@ -6185,7 +6060,7 @@
           <a:bodyPr wrap="square" lIns="0" tIns="0" rIns="0" bIns="0" rtlCol="0" anchor="ctr"/>
           <a:lstStyle/>
           <a:p>
-            <a:pPr indent="0" marL="0">
+            <a:pPr marL="0" indent="0">
               <a:buNone/>
             </a:pPr>
             <a:r>
@@ -6249,7 +6124,7 @@
           <a:bodyPr wrap="square" lIns="0" tIns="0" rIns="0" bIns="0" rtlCol="0" anchor="t"/>
           <a:lstStyle/>
           <a:p>
-            <a:pPr indent="0" marL="0">
+            <a:pPr marL="0" indent="0">
               <a:buNone/>
             </a:pPr>
             <a:r>
@@ -6315,7 +6190,7 @@
           <a:bodyPr wrap="square" lIns="0" tIns="0" rIns="0" bIns="0" rtlCol="0" anchor="ctr"/>
           <a:lstStyle/>
           <a:p>
-            <a:pPr algn="ctr" indent="0" marL="0">
+            <a:pPr marL="0" indent="0" algn="ctr">
               <a:buNone/>
             </a:pPr>
             <a:r>
@@ -6379,7 +6254,7 @@
           <a:bodyPr wrap="square" lIns="0" tIns="0" rIns="0" bIns="0" rtlCol="0" anchor="ctr"/>
           <a:lstStyle/>
           <a:p>
-            <a:pPr indent="0" marL="0">
+            <a:pPr marL="0" indent="0">
               <a:buNone/>
             </a:pPr>
             <a:r>
@@ -6443,7 +6318,7 @@
           <a:bodyPr wrap="square" lIns="0" tIns="0" rIns="0" bIns="0" rtlCol="0" anchor="t"/>
           <a:lstStyle/>
           <a:p>
-            <a:pPr indent="0" marL="0">
+            <a:pPr marL="0" indent="0">
               <a:buNone/>
             </a:pPr>
             <a:r>
@@ -6509,7 +6384,7 @@
           <a:bodyPr wrap="square" lIns="0" tIns="0" rIns="0" bIns="0" rtlCol="0" anchor="ctr"/>
           <a:lstStyle/>
           <a:p>
-            <a:pPr algn="ctr" indent="0" marL="0">
+            <a:pPr marL="0" indent="0" algn="ctr">
               <a:buNone/>
             </a:pPr>
             <a:r>
@@ -6573,7 +6448,7 @@
           <a:bodyPr wrap="square" lIns="0" tIns="0" rIns="0" bIns="0" rtlCol="0" anchor="ctr"/>
           <a:lstStyle/>
           <a:p>
-            <a:pPr indent="0" marL="0">
+            <a:pPr marL="0" indent="0">
               <a:buNone/>
             </a:pPr>
             <a:r>
@@ -6637,7 +6512,7 @@
           <a:bodyPr wrap="square" lIns="0" tIns="0" rIns="0" bIns="0" rtlCol="0" anchor="t"/>
           <a:lstStyle/>
           <a:p>
-            <a:pPr indent="0" marL="0">
+            <a:pPr marL="0" indent="0">
               <a:buNone/>
             </a:pPr>
             <a:r>
@@ -6703,7 +6578,7 @@
           <a:bodyPr wrap="square" lIns="0" tIns="0" rIns="0" bIns="0" rtlCol="0" anchor="ctr"/>
           <a:lstStyle/>
           <a:p>
-            <a:pPr algn="ctr" indent="0" marL="0">
+            <a:pPr marL="0" indent="0" algn="ctr">
               <a:buNone/>
             </a:pPr>
             <a:r>
@@ -6767,7 +6642,7 @@
           <a:bodyPr wrap="square" lIns="0" tIns="0" rIns="0" bIns="0" rtlCol="0" anchor="ctr"/>
           <a:lstStyle/>
           <a:p>
-            <a:pPr indent="0" marL="0">
+            <a:pPr marL="0" indent="0">
               <a:buNone/>
             </a:pPr>
             <a:r>
@@ -6831,7 +6706,7 @@
           <a:bodyPr wrap="square" lIns="0" tIns="0" rIns="0" bIns="0" rtlCol="0" anchor="t"/>
           <a:lstStyle/>
           <a:p>
-            <a:pPr indent="0" marL="0">
+            <a:pPr marL="0" indent="0">
               <a:buNone/>
             </a:pPr>
             <a:r>
@@ -6897,7 +6772,7 @@
           <a:bodyPr wrap="square" lIns="0" tIns="0" rIns="0" bIns="0" rtlCol="0" anchor="ctr"/>
           <a:lstStyle/>
           <a:p>
-            <a:pPr algn="ctr" indent="0" marL="0">
+            <a:pPr marL="0" indent="0" algn="ctr">
               <a:buNone/>
             </a:pPr>
             <a:r>
@@ -6961,7 +6836,7 @@
           <a:bodyPr wrap="square" lIns="0" tIns="0" rIns="0" bIns="0" rtlCol="0" anchor="ctr"/>
           <a:lstStyle/>
           <a:p>
-            <a:pPr indent="0" marL="0">
+            <a:pPr marL="0" indent="0">
               <a:buNone/>
             </a:pPr>
             <a:r>
@@ -7025,7 +6900,7 @@
           <a:bodyPr wrap="square" lIns="0" tIns="0" rIns="0" bIns="0" rtlCol="0" anchor="t"/>
           <a:lstStyle/>
           <a:p>
-            <a:pPr indent="0" marL="0">
+            <a:pPr marL="0" indent="0">
               <a:buNone/>
             </a:pPr>
             <a:r>
@@ -7091,7 +6966,7 @@
           <a:bodyPr wrap="square" lIns="0" tIns="0" rIns="0" bIns="0" rtlCol="0" anchor="ctr"/>
           <a:lstStyle/>
           <a:p>
-            <a:pPr algn="ctr" indent="0" marL="0">
+            <a:pPr marL="0" indent="0" algn="ctr">
               <a:buNone/>
             </a:pPr>
             <a:r>
@@ -7130,7 +7005,7 @@
           <a:bodyPr wrap="square" lIns="0" tIns="0" rIns="0" bIns="0" rtlCol="0" anchor="ctr"/>
           <a:lstStyle/>
           <a:p>
-            <a:pPr indent="0" marL="0">
+            <a:pPr marL="0" indent="0">
               <a:buNone/>
             </a:pPr>
             <a:r>
@@ -7275,7 +7150,7 @@
           <a:bodyPr wrap="square" lIns="0" tIns="0" rIns="0" bIns="0" rtlCol="0" anchor="ctr"/>
           <a:lstStyle/>
           <a:p>
-            <a:pPr indent="0" marL="0">
+            <a:pPr marL="0" indent="0">
               <a:buNone/>
             </a:pPr>
             <a:r>
@@ -7445,7 +7320,7 @@
           <a:bodyPr wrap="square" lIns="0" tIns="0" rIns="0" bIns="0" rtlCol="0" anchor="ctr"/>
           <a:lstStyle/>
           <a:p>
-            <a:pPr algn="ctr" indent="0" marL="0">
+            <a:pPr marL="0" indent="0" algn="ctr">
               <a:buNone/>
             </a:pPr>
             <a:r>
@@ -7457,21 +7332,7 @@
                 <a:ea typeface="PT Sans" pitchFamily="34" charset="-122"/>
                 <a:cs typeface="PT Sans" pitchFamily="34" charset="-120"/>
               </a:rPr>
-              <a:t>AIORI 3</a:t>
-            </a:r>
-            <a:pPr algn="ctr" indent="0" marL="0">
-              <a:buNone/>
-            </a:pPr>
-            <a:r>
-              <a:rPr lang="en-US" sz="750" b="1" dirty="0">
-                <a:solidFill>
-                  <a:srgbClr val="0000DC"/>
-                </a:solidFill>
-                <a:latin typeface="PT Sans" pitchFamily="34" charset="0"/>
-                <a:ea typeface="PT Sans" pitchFamily="34" charset="-122"/>
-                <a:cs typeface="PT Sans" pitchFamily="34" charset="-120"/>
-              </a:rPr>
-              <a:t>      Solution Optimization</a:t>
+              <a:t>AIORI 3      Solution Optimization</a:t>
             </a:r>
             <a:endParaRPr lang="en-US" sz="750" dirty="0"/>
           </a:p>
@@ -7498,7 +7359,7 @@
           <a:bodyPr wrap="square" lIns="0" tIns="0" rIns="0" bIns="0" rtlCol="0" anchor="ctr"/>
           <a:lstStyle/>
           <a:p>
-            <a:pPr indent="0" marL="0">
+            <a:pPr marL="0" indent="0">
               <a:buNone/>
             </a:pPr>
             <a:r>
@@ -7537,7 +7398,7 @@
           <a:bodyPr wrap="square" lIns="0" tIns="0" rIns="0" bIns="0" rtlCol="0" anchor="t"/>
           <a:lstStyle/>
           <a:p>
-            <a:pPr indent="0" marL="0">
+            <a:pPr marL="0" indent="0">
               <a:buNone/>
             </a:pPr>
             <a:r>
@@ -7576,7 +7437,7 @@
           <a:bodyPr wrap="square" lIns="0" tIns="0" rIns="0" bIns="0" rtlCol="0" anchor="ctr"/>
           <a:lstStyle/>
           <a:p>
-            <a:pPr indent="0" marL="0">
+            <a:pPr marL="0" indent="0">
               <a:buNone/>
             </a:pPr>
             <a:r>
@@ -7590,9 +7451,6 @@
               </a:rPr>
               <a:t>D. Grace T T • </a:t>
             </a:r>
-            <a:pPr indent="0" marL="0">
-              <a:buNone/>
-            </a:pPr>
             <a:r>
               <a:rPr lang="en-US" sz="750" b="1" dirty="0">
                 <a:solidFill>
@@ -7604,9 +7462,6 @@
               </a:rPr>
               <a:t>A3-PS001-TC034</a:t>
             </a:r>
-            <a:pPr indent="0" marL="0">
-              <a:buNone/>
-            </a:pPr>
             <a:r>
               <a:rPr lang="en-US" sz="750" dirty="0">
                 <a:solidFill>
@@ -7643,7 +7498,7 @@
           <a:bodyPr wrap="square" lIns="0" tIns="0" rIns="0" bIns="0" rtlCol="0" anchor="ctr"/>
           <a:lstStyle/>
           <a:p>
-            <a:pPr algn="r" indent="0" marL="0">
+            <a:pPr marL="0" indent="0" algn="r">
               <a:buNone/>
             </a:pPr>
             <a:r>
@@ -7677,17 +7532,41 @@
         </p:nvGraphicFramePr>
         <p:xfrm>
           <a:off x="457200" y="1280160"/>
-          <a:ext cx="8229600" cy="914400"/>
+          <a:ext cx="8229600" cy="2494788"/>
         </p:xfrm>
         <a:graphic>
           <a:graphicData uri="http://schemas.openxmlformats.org/drawingml/2006/table">
             <a:tbl>
               <a:tblPr/>
               <a:tblGrid>
-                <a:gridCol w="1143000"/>
-                <a:gridCol w="2148840"/>
-                <a:gridCol w="3063240"/>
-                <a:gridCol w="1874520"/>
+                <a:gridCol w="1143000">
+                  <a:extLst>
+                    <a:ext uri="{9D8B030D-6E8A-4147-A177-3AD203B41FA5}">
+                      <a16:colId xmlns:a16="http://schemas.microsoft.com/office/drawing/2014/main" val="20000"/>
+                    </a:ext>
+                  </a:extLst>
+                </a:gridCol>
+                <a:gridCol w="2148840">
+                  <a:extLst>
+                    <a:ext uri="{9D8B030D-6E8A-4147-A177-3AD203B41FA5}">
+                      <a16:colId xmlns:a16="http://schemas.microsoft.com/office/drawing/2014/main" val="20001"/>
+                    </a:ext>
+                  </a:extLst>
+                </a:gridCol>
+                <a:gridCol w="3063240">
+                  <a:extLst>
+                    <a:ext uri="{9D8B030D-6E8A-4147-A177-3AD203B41FA5}">
+                      <a16:colId xmlns:a16="http://schemas.microsoft.com/office/drawing/2014/main" val="20002"/>
+                    </a:ext>
+                  </a:extLst>
+                </a:gridCol>
+                <a:gridCol w="1874520">
+                  <a:extLst>
+                    <a:ext uri="{9D8B030D-6E8A-4147-A177-3AD203B41FA5}">
+                      <a16:colId xmlns:a16="http://schemas.microsoft.com/office/drawing/2014/main" val="20003"/>
+                    </a:ext>
+                  </a:extLst>
+                </a:gridCol>
               </a:tblGrid>
               <a:tr h="0">
                 <a:tc>
@@ -7695,7 +7574,7 @@
                     <a:bodyPr/>
                     <a:lstStyle/>
                     <a:p>
-                      <a:pPr indent="0" marL="0">
+                      <a:pPr marL="0" indent="0">
                         <a:buNone/>
                       </a:pPr>
                       <a:r>
@@ -7763,7 +7642,7 @@
                     <a:bodyPr/>
                     <a:lstStyle/>
                     <a:p>
-                      <a:pPr indent="0" marL="0">
+                      <a:pPr marL="0" indent="0">
                         <a:buNone/>
                       </a:pPr>
                       <a:r>
@@ -7831,7 +7710,7 @@
                     <a:bodyPr/>
                     <a:lstStyle/>
                     <a:p>
-                      <a:pPr indent="0" marL="0">
+                      <a:pPr marL="0" indent="0">
                         <a:buNone/>
                       </a:pPr>
                       <a:r>
@@ -7899,7 +7778,7 @@
                     <a:bodyPr/>
                     <a:lstStyle/>
                     <a:p>
-                      <a:pPr indent="0" marL="0">
+                      <a:pPr marL="0" indent="0">
                         <a:buNone/>
                       </a:pPr>
                       <a:r>
@@ -7962,6 +7841,11 @@
                     </a:solidFill>
                   </a:tcPr>
                 </a:tc>
+                <a:extLst>
+                  <a:ext uri="{0D108BD9-81ED-4DB2-BD59-A6C34878D82A}">
+                    <a16:rowId xmlns:a16="http://schemas.microsoft.com/office/drawing/2014/main" val="10000"/>
+                  </a:ext>
+                </a:extLst>
               </a:tr>
               <a:tr h="0">
                 <a:tc>
@@ -7969,7 +7853,7 @@
                     <a:bodyPr/>
                     <a:lstStyle/>
                     <a:p>
-                      <a:pPr indent="0" marL="0">
+                      <a:pPr marL="0" indent="0">
                         <a:buNone/>
                       </a:pPr>
                       <a:r>
@@ -8037,7 +7921,7 @@
                     <a:bodyPr/>
                     <a:lstStyle/>
                     <a:p>
-                      <a:pPr indent="0" marL="0">
+                      <a:pPr marL="0" indent="0">
                         <a:buNone/>
                       </a:pPr>
                       <a:r>
@@ -8105,7 +7989,7 @@
                     <a:bodyPr/>
                     <a:lstStyle/>
                     <a:p>
-                      <a:pPr indent="0" marL="0">
+                      <a:pPr marL="0" indent="0">
                         <a:buNone/>
                       </a:pPr>
                       <a:r>
@@ -8173,7 +8057,7 @@
                     <a:bodyPr/>
                     <a:lstStyle/>
                     <a:p>
-                      <a:pPr indent="0" marL="0">
+                      <a:pPr marL="0" indent="0">
                         <a:buNone/>
                       </a:pPr>
                       <a:r>
@@ -8236,6 +8120,11 @@
                     </a:solidFill>
                   </a:tcPr>
                 </a:tc>
+                <a:extLst>
+                  <a:ext uri="{0D108BD9-81ED-4DB2-BD59-A6C34878D82A}">
+                    <a16:rowId xmlns:a16="http://schemas.microsoft.com/office/drawing/2014/main" val="10001"/>
+                  </a:ext>
+                </a:extLst>
               </a:tr>
               <a:tr h="0">
                 <a:tc>
@@ -8243,7 +8132,7 @@
                     <a:bodyPr/>
                     <a:lstStyle/>
                     <a:p>
-                      <a:pPr indent="0" marL="0">
+                      <a:pPr marL="0" indent="0">
                         <a:buNone/>
                       </a:pPr>
                       <a:r>
@@ -8311,7 +8200,7 @@
                     <a:bodyPr/>
                     <a:lstStyle/>
                     <a:p>
-                      <a:pPr indent="0" marL="0">
+                      <a:pPr marL="0" indent="0">
                         <a:buNone/>
                       </a:pPr>
                       <a:r>
@@ -8379,7 +8268,7 @@
                     <a:bodyPr/>
                     <a:lstStyle/>
                     <a:p>
-                      <a:pPr indent="0" marL="0">
+                      <a:pPr marL="0" indent="0">
                         <a:buNone/>
                       </a:pPr>
                       <a:r>
@@ -8447,7 +8336,7 @@
                     <a:bodyPr/>
                     <a:lstStyle/>
                     <a:p>
-                      <a:pPr indent="0" marL="0">
+                      <a:pPr marL="0" indent="0">
                         <a:buNone/>
                       </a:pPr>
                       <a:r>
@@ -8510,6 +8399,11 @@
                     </a:solidFill>
                   </a:tcPr>
                 </a:tc>
+                <a:extLst>
+                  <a:ext uri="{0D108BD9-81ED-4DB2-BD59-A6C34878D82A}">
+                    <a16:rowId xmlns:a16="http://schemas.microsoft.com/office/drawing/2014/main" val="10002"/>
+                  </a:ext>
+                </a:extLst>
               </a:tr>
               <a:tr h="0">
                 <a:tc>
@@ -8517,7 +8411,7 @@
                     <a:bodyPr/>
                     <a:lstStyle/>
                     <a:p>
-                      <a:pPr indent="0" marL="0">
+                      <a:pPr marL="0" indent="0">
                         <a:buNone/>
                       </a:pPr>
                       <a:r>
@@ -8585,7 +8479,7 @@
                     <a:bodyPr/>
                     <a:lstStyle/>
                     <a:p>
-                      <a:pPr indent="0" marL="0">
+                      <a:pPr marL="0" indent="0">
                         <a:buNone/>
                       </a:pPr>
                       <a:r>
@@ -8653,7 +8547,7 @@
                     <a:bodyPr/>
                     <a:lstStyle/>
                     <a:p>
-                      <a:pPr indent="0" marL="0">
+                      <a:pPr marL="0" indent="0">
                         <a:buNone/>
                       </a:pPr>
                       <a:r>
@@ -8721,7 +8615,7 @@
                     <a:bodyPr/>
                     <a:lstStyle/>
                     <a:p>
-                      <a:pPr indent="0" marL="0">
+                      <a:pPr marL="0" indent="0">
                         <a:buNone/>
                       </a:pPr>
                       <a:r>
@@ -8784,6 +8678,11 @@
                     </a:solidFill>
                   </a:tcPr>
                 </a:tc>
+                <a:extLst>
+                  <a:ext uri="{0D108BD9-81ED-4DB2-BD59-A6C34878D82A}">
+                    <a16:rowId xmlns:a16="http://schemas.microsoft.com/office/drawing/2014/main" val="10003"/>
+                  </a:ext>
+                </a:extLst>
               </a:tr>
               <a:tr h="0">
                 <a:tc>
@@ -8791,7 +8690,7 @@
                     <a:bodyPr/>
                     <a:lstStyle/>
                     <a:p>
-                      <a:pPr indent="0" marL="0">
+                      <a:pPr marL="0" indent="0">
                         <a:buNone/>
                       </a:pPr>
                       <a:r>
@@ -8859,7 +8758,7 @@
                     <a:bodyPr/>
                     <a:lstStyle/>
                     <a:p>
-                      <a:pPr indent="0" marL="0">
+                      <a:pPr marL="0" indent="0">
                         <a:buNone/>
                       </a:pPr>
                       <a:r>
@@ -8927,7 +8826,7 @@
                     <a:bodyPr/>
                     <a:lstStyle/>
                     <a:p>
-                      <a:pPr indent="0" marL="0">
+                      <a:pPr marL="0" indent="0">
                         <a:buNone/>
                       </a:pPr>
                       <a:r>
@@ -8995,7 +8894,7 @@
                     <a:bodyPr/>
                     <a:lstStyle/>
                     <a:p>
-                      <a:pPr indent="0" marL="0">
+                      <a:pPr marL="0" indent="0">
                         <a:buNone/>
                       </a:pPr>
                       <a:r>
@@ -9058,6 +8957,11 @@
                     </a:solidFill>
                   </a:tcPr>
                 </a:tc>
+                <a:extLst>
+                  <a:ext uri="{0D108BD9-81ED-4DB2-BD59-A6C34878D82A}">
+                    <a16:rowId xmlns:a16="http://schemas.microsoft.com/office/drawing/2014/main" val="10004"/>
+                  </a:ext>
+                </a:extLst>
               </a:tr>
               <a:tr h="0">
                 <a:tc>
@@ -9065,7 +8969,7 @@
                     <a:bodyPr/>
                     <a:lstStyle/>
                     <a:p>
-                      <a:pPr indent="0" marL="0">
+                      <a:pPr marL="0" indent="0">
                         <a:buNone/>
                       </a:pPr>
                       <a:r>
@@ -9133,7 +9037,7 @@
                     <a:bodyPr/>
                     <a:lstStyle/>
                     <a:p>
-                      <a:pPr indent="0" marL="0">
+                      <a:pPr marL="0" indent="0">
                         <a:buNone/>
                       </a:pPr>
                       <a:r>
@@ -9201,7 +9105,7 @@
                     <a:bodyPr/>
                     <a:lstStyle/>
                     <a:p>
-                      <a:pPr indent="0" marL="0">
+                      <a:pPr marL="0" indent="0">
                         <a:buNone/>
                       </a:pPr>
                       <a:r>
@@ -9269,7 +9173,7 @@
                     <a:bodyPr/>
                     <a:lstStyle/>
                     <a:p>
-                      <a:pPr indent="0" marL="0">
+                      <a:pPr marL="0" indent="0">
                         <a:buNone/>
                       </a:pPr>
                       <a:r>
@@ -9332,6 +9236,11 @@
                     </a:solidFill>
                   </a:tcPr>
                 </a:tc>
+                <a:extLst>
+                  <a:ext uri="{0D108BD9-81ED-4DB2-BD59-A6C34878D82A}">
+                    <a16:rowId xmlns:a16="http://schemas.microsoft.com/office/drawing/2014/main" val="10005"/>
+                  </a:ext>
+                </a:extLst>
               </a:tr>
             </a:tbl>
           </a:graphicData>
@@ -9358,7 +9267,7 @@
           <a:bodyPr wrap="square" lIns="0" tIns="0" rIns="0" bIns="0" rtlCol="0" anchor="ctr"/>
           <a:lstStyle/>
           <a:p>
-            <a:pPr indent="0" marL="0">
+            <a:pPr marL="0" indent="0">
               <a:buNone/>
             </a:pPr>
             <a:r>
@@ -9422,7 +9331,7 @@
           <a:bodyPr wrap="square" lIns="0" tIns="0" rIns="0" bIns="0" rtlCol="0" anchor="ctr"/>
           <a:lstStyle/>
           <a:p>
-            <a:pPr algn="ctr" indent="0" marL="0">
+            <a:pPr marL="0" indent="0" algn="ctr">
               <a:buNone/>
             </a:pPr>
             <a:r>
@@ -9434,21 +9343,7 @@
                 <a:ea typeface="PT Sans" pitchFamily="34" charset="-122"/>
                 <a:cs typeface="PT Sans" pitchFamily="34" charset="-120"/>
               </a:rPr>
-              <a:t>AIORI 3</a:t>
-            </a:r>
-            <a:pPr algn="ctr" indent="0" marL="0">
-              <a:buNone/>
-            </a:pPr>
-            <a:r>
-              <a:rPr lang="en-US" sz="750" b="1" dirty="0">
-                <a:solidFill>
-                  <a:srgbClr val="0000DC"/>
-                </a:solidFill>
-                <a:latin typeface="PT Sans" pitchFamily="34" charset="0"/>
-                <a:ea typeface="PT Sans" pitchFamily="34" charset="-122"/>
-                <a:cs typeface="PT Sans" pitchFamily="34" charset="-120"/>
-              </a:rPr>
-              <a:t>      Architecture Design (UML Diagram)</a:t>
+              <a:t>AIORI 3      Architecture Design (UML Diagram)</a:t>
             </a:r>
             <a:endParaRPr lang="en-US" sz="750" dirty="0"/>
           </a:p>
@@ -9475,7 +9370,7 @@
           <a:bodyPr wrap="square" lIns="0" tIns="0" rIns="0" bIns="0" rtlCol="0" anchor="ctr"/>
           <a:lstStyle/>
           <a:p>
-            <a:pPr indent="0" marL="0">
+            <a:pPr marL="0" indent="0">
               <a:buNone/>
             </a:pPr>
             <a:r>
@@ -9514,7 +9409,7 @@
           <a:bodyPr wrap="square" lIns="0" tIns="0" rIns="0" bIns="0" rtlCol="0" anchor="t"/>
           <a:lstStyle/>
           <a:p>
-            <a:pPr indent="0" marL="0">
+            <a:pPr marL="0" indent="0">
               <a:buNone/>
             </a:pPr>
             <a:r>
@@ -9553,7 +9448,7 @@
           <a:bodyPr wrap="square" lIns="0" tIns="0" rIns="0" bIns="0" rtlCol="0" anchor="ctr"/>
           <a:lstStyle/>
           <a:p>
-            <a:pPr indent="0" marL="0">
+            <a:pPr marL="0" indent="0">
               <a:buNone/>
             </a:pPr>
             <a:r>
@@ -9567,9 +9462,6 @@
               </a:rPr>
               <a:t>D. Grace T T • </a:t>
             </a:r>
-            <a:pPr indent="0" marL="0">
-              <a:buNone/>
-            </a:pPr>
             <a:r>
               <a:rPr lang="en-US" sz="750" b="1" dirty="0">
                 <a:solidFill>
@@ -9581,9 +9473,6 @@
               </a:rPr>
               <a:t>A3-PS001-TC034</a:t>
             </a:r>
-            <a:pPr indent="0" marL="0">
-              <a:buNone/>
-            </a:pPr>
             <a:r>
               <a:rPr lang="en-US" sz="750" dirty="0">
                 <a:solidFill>
@@ -9620,7 +9509,7 @@
           <a:bodyPr wrap="square" lIns="0" tIns="0" rIns="0" bIns="0" rtlCol="0" anchor="ctr"/>
           <a:lstStyle/>
           <a:p>
-            <a:pPr algn="r" indent="0" marL="0">
+            <a:pPr marL="0" indent="0" algn="r">
               <a:buNone/>
             </a:pPr>
             <a:r>
@@ -9684,7 +9573,7 @@
           <a:bodyPr wrap="square" lIns="0" tIns="0" rIns="0" bIns="0" rtlCol="0" anchor="ctr"/>
           <a:lstStyle/>
           <a:p>
-            <a:pPr indent="0" marL="0">
+            <a:pPr marL="0" indent="0">
               <a:buNone/>
             </a:pPr>
             <a:r>
@@ -9748,7 +9637,7 @@
           <a:bodyPr wrap="square" lIns="0" tIns="0" rIns="0" bIns="0" rtlCol="0" anchor="ctr"/>
           <a:lstStyle/>
           <a:p>
-            <a:pPr indent="0" marL="0">
+            <a:pPr marL="0" indent="0">
               <a:buNone/>
             </a:pPr>
             <a:r>
@@ -9812,7 +9701,7 @@
           <a:bodyPr wrap="square" lIns="254" tIns="254" rIns="254" bIns="254" rtlCol="0" anchor="ctr"/>
           <a:lstStyle/>
           <a:p>
-            <a:pPr algn="ctr" indent="0" marL="0">
+            <a:pPr marL="0" indent="0" algn="ctr">
               <a:buNone/>
             </a:pPr>
             <a:r>
@@ -9829,7 +9718,7 @@
             <a:endParaRPr lang="en-US" sz="800" dirty="0"/>
           </a:p>
           <a:p>
-            <a:pPr algn="ctr" indent="0" marL="0">
+            <a:pPr marL="0" indent="0" algn="ctr">
               <a:buNone/>
             </a:pPr>
             <a:r>
@@ -9893,7 +9782,7 @@
           <a:bodyPr wrap="square" lIns="254" tIns="254" rIns="254" bIns="254" rtlCol="0" anchor="ctr"/>
           <a:lstStyle/>
           <a:p>
-            <a:pPr algn="ctr" indent="0" marL="0">
+            <a:pPr marL="0" indent="0" algn="ctr">
               <a:buNone/>
             </a:pPr>
             <a:r>
@@ -9910,7 +9799,7 @@
             <a:endParaRPr lang="en-US" sz="800" dirty="0"/>
           </a:p>
           <a:p>
-            <a:pPr algn="ctr" indent="0" marL="0">
+            <a:pPr marL="0" indent="0" algn="ctr">
               <a:buNone/>
             </a:pPr>
             <a:r>
@@ -9974,7 +9863,7 @@
           <a:bodyPr wrap="square" lIns="254" tIns="254" rIns="254" bIns="254" rtlCol="0" anchor="ctr"/>
           <a:lstStyle/>
           <a:p>
-            <a:pPr algn="ctr" indent="0" marL="0">
+            <a:pPr marL="0" indent="0" algn="ctr">
               <a:buNone/>
             </a:pPr>
             <a:r>
@@ -9991,7 +9880,7 @@
             <a:endParaRPr lang="en-US" sz="800" dirty="0"/>
           </a:p>
           <a:p>
-            <a:pPr algn="ctr" indent="0" marL="0">
+            <a:pPr marL="0" indent="0" algn="ctr">
               <a:buNone/>
             </a:pPr>
             <a:r>
@@ -10055,7 +9944,7 @@
           <a:bodyPr wrap="square" lIns="254" tIns="254" rIns="254" bIns="254" rtlCol="0" anchor="ctr"/>
           <a:lstStyle/>
           <a:p>
-            <a:pPr algn="ctr" indent="0" marL="0">
+            <a:pPr marL="0" indent="0" algn="ctr">
               <a:buNone/>
             </a:pPr>
             <a:r>
@@ -10072,7 +9961,7 @@
             <a:endParaRPr lang="en-US" sz="800" dirty="0"/>
           </a:p>
           <a:p>
-            <a:pPr algn="ctr" indent="0" marL="0">
+            <a:pPr marL="0" indent="0" algn="ctr">
               <a:buNone/>
             </a:pPr>
             <a:r>
@@ -10136,7 +10025,7 @@
           <a:bodyPr wrap="square" lIns="0" tIns="0" rIns="0" bIns="0" rtlCol="0" anchor="ctr"/>
           <a:lstStyle/>
           <a:p>
-            <a:pPr indent="0" marL="0">
+            <a:pPr marL="0" indent="0">
               <a:buNone/>
             </a:pPr>
             <a:r>
@@ -10200,7 +10089,7 @@
           <a:bodyPr wrap="square" lIns="254" tIns="254" rIns="254" bIns="254" rtlCol="0" anchor="ctr"/>
           <a:lstStyle/>
           <a:p>
-            <a:pPr algn="ctr" indent="0" marL="0">
+            <a:pPr marL="0" indent="0" algn="ctr">
               <a:buNone/>
             </a:pPr>
             <a:r>
@@ -10217,7 +10106,7 @@
             <a:endParaRPr lang="en-US" sz="800" dirty="0"/>
           </a:p>
           <a:p>
-            <a:pPr algn="ctr" indent="0" marL="0">
+            <a:pPr marL="0" indent="0" algn="ctr">
               <a:buNone/>
             </a:pPr>
             <a:r>
@@ -10281,7 +10170,7 @@
           <a:bodyPr wrap="square" lIns="254" tIns="254" rIns="254" bIns="254" rtlCol="0" anchor="ctr"/>
           <a:lstStyle/>
           <a:p>
-            <a:pPr algn="ctr" indent="0" marL="0">
+            <a:pPr marL="0" indent="0" algn="ctr">
               <a:buNone/>
             </a:pPr>
             <a:r>
@@ -10298,7 +10187,7 @@
             <a:endParaRPr lang="en-US" sz="800" dirty="0"/>
           </a:p>
           <a:p>
-            <a:pPr algn="ctr" indent="0" marL="0">
+            <a:pPr marL="0" indent="0" algn="ctr">
               <a:buNone/>
             </a:pPr>
             <a:r>
@@ -10362,7 +10251,7 @@
           <a:bodyPr wrap="square" lIns="254" tIns="254" rIns="254" bIns="254" rtlCol="0" anchor="ctr"/>
           <a:lstStyle/>
           <a:p>
-            <a:pPr algn="ctr" indent="0" marL="0">
+            <a:pPr marL="0" indent="0" algn="ctr">
               <a:buNone/>
             </a:pPr>
             <a:r>
@@ -10379,7 +10268,7 @@
             <a:endParaRPr lang="en-US" sz="800" dirty="0"/>
           </a:p>
           <a:p>
-            <a:pPr algn="ctr" indent="0" marL="0">
+            <a:pPr marL="0" indent="0" algn="ctr">
               <a:buNone/>
             </a:pPr>
             <a:r>
@@ -10443,7 +10332,7 @@
           <a:bodyPr wrap="square" lIns="254" tIns="254" rIns="254" bIns="254" rtlCol="0" anchor="ctr"/>
           <a:lstStyle/>
           <a:p>
-            <a:pPr algn="ctr" indent="0" marL="0">
+            <a:pPr marL="0" indent="0" algn="ctr">
               <a:buNone/>
             </a:pPr>
             <a:r>
@@ -10460,7 +10349,7 @@
             <a:endParaRPr lang="en-US" sz="800" dirty="0"/>
           </a:p>
           <a:p>
-            <a:pPr algn="ctr" indent="0" marL="0">
+            <a:pPr marL="0" indent="0" algn="ctr">
               <a:buNone/>
             </a:pPr>
             <a:r>
@@ -10477,7 +10366,7 @@
             <a:endParaRPr lang="en-US" sz="800" dirty="0"/>
           </a:p>
           <a:p>
-            <a:pPr algn="ctr" indent="0" marL="0">
+            <a:pPr marL="0" indent="0" algn="ctr">
               <a:buNone/>
             </a:pPr>
             <a:r>
@@ -10541,7 +10430,7 @@
           <a:bodyPr wrap="square" lIns="254" tIns="254" rIns="254" bIns="254" rtlCol="0" anchor="ctr"/>
           <a:lstStyle/>
           <a:p>
-            <a:pPr algn="ctr" indent="0" marL="0">
+            <a:pPr marL="0" indent="0" algn="ctr">
               <a:buNone/>
             </a:pPr>
             <a:r>
@@ -10558,7 +10447,7 @@
             <a:endParaRPr lang="en-US" sz="800" dirty="0"/>
           </a:p>
           <a:p>
-            <a:pPr algn="ctr" indent="0" marL="0">
+            <a:pPr marL="0" indent="0" algn="ctr">
               <a:buNone/>
             </a:pPr>
             <a:r>
@@ -10622,7 +10511,7 @@
           <a:bodyPr wrap="square" lIns="254" tIns="254" rIns="254" bIns="254" rtlCol="0" anchor="ctr"/>
           <a:lstStyle/>
           <a:p>
-            <a:pPr algn="ctr" indent="0" marL="0">
+            <a:pPr marL="0" indent="0" algn="ctr">
               <a:buNone/>
             </a:pPr>
             <a:r>
@@ -10639,7 +10528,7 @@
             <a:endParaRPr lang="en-US" sz="800" dirty="0"/>
           </a:p>
           <a:p>
-            <a:pPr algn="ctr" indent="0" marL="0">
+            <a:pPr marL="0" indent="0" algn="ctr">
               <a:buNone/>
             </a:pPr>
             <a:r>
@@ -10700,10 +10589,10 @@
           <a:ln/>
         </p:spPr>
         <p:txBody>
-          <a:bodyPr wrap="square" lIns="0" tIns="0" rIns="0" bIns="0" rtlCol="0" anchor="ctr" vert="vert270"/>
-          <a:lstStyle/>
-          <a:p>
-            <a:pPr algn="ctr" indent="0" marL="0">
+          <a:bodyPr vert="vert270" wrap="square" lIns="0" tIns="0" rIns="0" bIns="0" rtlCol="0" anchor="ctr"/>
+          <a:lstStyle/>
+          <a:p>
+            <a:pPr marL="0" indent="0" algn="ctr">
               <a:buNone/>
             </a:pPr>
             <a:r>
@@ -10767,7 +10656,7 @@
           <a:bodyPr wrap="square" lIns="0" tIns="0" rIns="0" bIns="0" rtlCol="0" anchor="ctr"/>
           <a:lstStyle/>
           <a:p>
-            <a:pPr indent="0" marL="0">
+            <a:pPr marL="0" indent="0">
               <a:buNone/>
             </a:pPr>
             <a:r>
@@ -10831,7 +10720,7 @@
           <a:bodyPr wrap="square" lIns="254" tIns="254" rIns="254" bIns="254" rtlCol="0" anchor="ctr"/>
           <a:lstStyle/>
           <a:p>
-            <a:pPr algn="ctr" indent="0" marL="0">
+            <a:pPr marL="0" indent="0" algn="ctr">
               <a:buNone/>
             </a:pPr>
             <a:r>
@@ -10848,7 +10737,7 @@
             <a:endParaRPr lang="en-US" sz="850" dirty="0"/>
           </a:p>
           <a:p>
-            <a:pPr algn="ctr" indent="0" marL="0">
+            <a:pPr marL="0" indent="0" algn="ctr">
               <a:buNone/>
             </a:pPr>
             <a:r>
@@ -10912,7 +10801,7 @@
           <a:bodyPr wrap="square" lIns="254" tIns="254" rIns="254" bIns="254" rtlCol="0" anchor="ctr"/>
           <a:lstStyle/>
           <a:p>
-            <a:pPr algn="ctr" indent="0" marL="0">
+            <a:pPr marL="0" indent="0" algn="ctr">
               <a:buNone/>
             </a:pPr>
             <a:r>
@@ -10929,7 +10818,7 @@
             <a:endParaRPr lang="en-US" sz="850" dirty="0"/>
           </a:p>
           <a:p>
-            <a:pPr algn="ctr" indent="0" marL="0">
+            <a:pPr marL="0" indent="0" algn="ctr">
               <a:buNone/>
             </a:pPr>
             <a:r>
@@ -10993,7 +10882,7 @@
           <a:bodyPr wrap="square" lIns="254" tIns="254" rIns="254" bIns="254" rtlCol="0" anchor="ctr"/>
           <a:lstStyle/>
           <a:p>
-            <a:pPr algn="ctr" indent="0" marL="0">
+            <a:pPr marL="0" indent="0" algn="ctr">
               <a:buNone/>
             </a:pPr>
             <a:r>
@@ -11010,7 +10899,7 @@
             <a:endParaRPr lang="en-US" sz="850" dirty="0"/>
           </a:p>
           <a:p>
-            <a:pPr algn="ctr" indent="0" marL="0">
+            <a:pPr marL="0" indent="0" algn="ctr">
               <a:buNone/>
             </a:pPr>
             <a:r>
@@ -11289,7 +11178,7 @@
           <a:bodyPr wrap="square" lIns="0" tIns="0" rIns="0" bIns="0" rtlCol="0" anchor="ctr"/>
           <a:lstStyle/>
           <a:p>
-            <a:pPr algn="ctr" indent="0" marL="0">
+            <a:pPr marL="0" indent="0" algn="ctr">
               <a:buNone/>
             </a:pPr>
             <a:r>
@@ -11328,7 +11217,7 @@
           <a:bodyPr wrap="square" lIns="0" tIns="0" rIns="0" bIns="0" rtlCol="0" anchor="ctr"/>
           <a:lstStyle/>
           <a:p>
-            <a:pPr algn="ctr" indent="0" marL="0">
+            <a:pPr marL="0" indent="0" algn="ctr">
               <a:buNone/>
             </a:pPr>
             <a:r>
@@ -11367,7 +11256,7 @@
           <a:bodyPr wrap="square" lIns="0" tIns="0" rIns="0" bIns="0" rtlCol="0" anchor="ctr"/>
           <a:lstStyle/>
           <a:p>
-            <a:pPr indent="0" marL="0">
+            <a:pPr marL="0" indent="0">
               <a:buNone/>
             </a:pPr>
             <a:r>
@@ -11431,7 +11320,7 @@
           <a:bodyPr wrap="square" lIns="0" tIns="0" rIns="0" bIns="0" rtlCol="0" anchor="ctr"/>
           <a:lstStyle/>
           <a:p>
-            <a:pPr algn="ctr" indent="0" marL="0">
+            <a:pPr marL="0" indent="0" algn="ctr">
               <a:buNone/>
             </a:pPr>
             <a:r>
@@ -11443,21 +11332,7 @@
                 <a:ea typeface="PT Sans" pitchFamily="34" charset="-122"/>
                 <a:cs typeface="PT Sans" pitchFamily="34" charset="-120"/>
               </a:rPr>
-              <a:t>AIORI 3</a:t>
-            </a:r>
-            <a:pPr algn="ctr" indent="0" marL="0">
-              <a:buNone/>
-            </a:pPr>
-            <a:r>
-              <a:rPr lang="en-US" sz="750" b="1" dirty="0">
-                <a:solidFill>
-                  <a:srgbClr val="0000DC"/>
-                </a:solidFill>
-                <a:latin typeface="PT Sans" pitchFamily="34" charset="0"/>
-                <a:ea typeface="PT Sans" pitchFamily="34" charset="-122"/>
-                <a:cs typeface="PT Sans" pitchFamily="34" charset="-120"/>
-              </a:rPr>
-              <a:t>      Data Flow Diagram</a:t>
+              <a:t>AIORI 3      Data Flow Diagram</a:t>
             </a:r>
             <a:endParaRPr lang="en-US" sz="750" dirty="0"/>
           </a:p>
@@ -11484,7 +11359,7 @@
           <a:bodyPr wrap="square" lIns="0" tIns="0" rIns="0" bIns="0" rtlCol="0" anchor="ctr"/>
           <a:lstStyle/>
           <a:p>
-            <a:pPr indent="0" marL="0">
+            <a:pPr marL="0" indent="0">
               <a:buNone/>
             </a:pPr>
             <a:r>
@@ -11523,7 +11398,7 @@
           <a:bodyPr wrap="square" lIns="0" tIns="0" rIns="0" bIns="0" rtlCol="0" anchor="t"/>
           <a:lstStyle/>
           <a:p>
-            <a:pPr indent="0" marL="0">
+            <a:pPr marL="0" indent="0">
               <a:buNone/>
             </a:pPr>
             <a:r>
@@ -11562,7 +11437,7 @@
           <a:bodyPr wrap="square" lIns="0" tIns="0" rIns="0" bIns="0" rtlCol="0" anchor="ctr"/>
           <a:lstStyle/>
           <a:p>
-            <a:pPr indent="0" marL="0">
+            <a:pPr marL="0" indent="0">
               <a:buNone/>
             </a:pPr>
             <a:r>
@@ -11576,9 +11451,6 @@
               </a:rPr>
               <a:t>D. Grace T T • </a:t>
             </a:r>
-            <a:pPr indent="0" marL="0">
-              <a:buNone/>
-            </a:pPr>
             <a:r>
               <a:rPr lang="en-US" sz="750" b="1" dirty="0">
                 <a:solidFill>
@@ -11590,9 +11462,6 @@
               </a:rPr>
               <a:t>A3-PS001-TC034</a:t>
             </a:r>
-            <a:pPr indent="0" marL="0">
-              <a:buNone/>
-            </a:pPr>
             <a:r>
               <a:rPr lang="en-US" sz="750" dirty="0">
                 <a:solidFill>
@@ -11629,7 +11498,7 @@
           <a:bodyPr wrap="square" lIns="0" tIns="0" rIns="0" bIns="0" rtlCol="0" anchor="ctr"/>
           <a:lstStyle/>
           <a:p>
-            <a:pPr algn="r" indent="0" marL="0">
+            <a:pPr marL="0" indent="0" algn="r">
               <a:buNone/>
             </a:pPr>
             <a:r>
@@ -11693,7 +11562,7 @@
           <a:bodyPr wrap="square" lIns="254" tIns="254" rIns="254" bIns="254" rtlCol="0" anchor="ctr"/>
           <a:lstStyle/>
           <a:p>
-            <a:pPr algn="ctr" indent="0" marL="0">
+            <a:pPr marL="0" indent="0" algn="ctr">
               <a:buNone/>
             </a:pPr>
             <a:r>
@@ -11710,7 +11579,7 @@
             <a:endParaRPr lang="en-US" sz="850" dirty="0"/>
           </a:p>
           <a:p>
-            <a:pPr algn="ctr" indent="0" marL="0">
+            <a:pPr marL="0" indent="0" algn="ctr">
               <a:buNone/>
             </a:pPr>
             <a:r>
@@ -11776,7 +11645,7 @@
           <a:bodyPr wrap="square" lIns="254" tIns="254" rIns="254" bIns="254" rtlCol="0" anchor="ctr"/>
           <a:lstStyle/>
           <a:p>
-            <a:pPr algn="ctr" indent="0" marL="0">
+            <a:pPr marL="0" indent="0" algn="ctr">
               <a:buNone/>
             </a:pPr>
             <a:r>
@@ -11793,7 +11662,7 @@
             <a:endParaRPr lang="en-US" sz="850" dirty="0"/>
           </a:p>
           <a:p>
-            <a:pPr algn="ctr" indent="0" marL="0">
+            <a:pPr marL="0" indent="0" algn="ctr">
               <a:buNone/>
             </a:pPr>
             <a:r>
@@ -11903,7 +11772,7 @@
           <a:bodyPr wrap="square" lIns="381" tIns="381" rIns="381" bIns="381" rtlCol="0" anchor="ctr"/>
           <a:lstStyle/>
           <a:p>
-            <a:pPr algn="ctr" indent="0" marL="0">
+            <a:pPr marL="0" indent="0" algn="ctr">
               <a:buNone/>
             </a:pPr>
             <a:r>
@@ -11969,7 +11838,7 @@
           <a:bodyPr wrap="square" lIns="254" tIns="254" rIns="254" bIns="254" rtlCol="0" anchor="ctr"/>
           <a:lstStyle/>
           <a:p>
-            <a:pPr algn="ctr" indent="0" marL="0">
+            <a:pPr marL="0" indent="0" algn="ctr">
               <a:buNone/>
             </a:pPr>
             <a:r>
@@ -11986,7 +11855,7 @@
             <a:endParaRPr lang="en-US" sz="850" dirty="0"/>
           </a:p>
           <a:p>
-            <a:pPr algn="ctr" indent="0" marL="0">
+            <a:pPr marL="0" indent="0" algn="ctr">
               <a:buNone/>
             </a:pPr>
             <a:r>
@@ -12052,7 +11921,7 @@
           <a:bodyPr wrap="square" lIns="254" tIns="254" rIns="254" bIns="254" rtlCol="0" anchor="ctr"/>
           <a:lstStyle/>
           <a:p>
-            <a:pPr algn="ctr" indent="0" marL="0">
+            <a:pPr marL="0" indent="0" algn="ctr">
               <a:buNone/>
             </a:pPr>
             <a:r>
@@ -12069,7 +11938,7 @@
             <a:endParaRPr lang="en-US" sz="850" dirty="0"/>
           </a:p>
           <a:p>
-            <a:pPr algn="ctr" indent="0" marL="0">
+            <a:pPr marL="0" indent="0" algn="ctr">
               <a:buNone/>
             </a:pPr>
             <a:r>
@@ -12204,7 +12073,7 @@
           <a:bodyPr wrap="square" lIns="0" tIns="0" rIns="0" bIns="0" rtlCol="0" anchor="ctr"/>
           <a:lstStyle/>
           <a:p>
-            <a:pPr algn="ctr" indent="0" marL="0">
+            <a:pPr marL="0" indent="0" algn="ctr">
               <a:buNone/>
             </a:pPr>
             <a:r>
@@ -12243,7 +12112,7 @@
           <a:bodyPr wrap="square" lIns="0" tIns="0" rIns="0" bIns="0" rtlCol="0" anchor="ctr"/>
           <a:lstStyle/>
           <a:p>
-            <a:pPr algn="ctr" indent="0" marL="0">
+            <a:pPr marL="0" indent="0" algn="ctr">
               <a:buNone/>
             </a:pPr>
             <a:r>
@@ -12306,7 +12175,7 @@
           <a:bodyPr wrap="square" lIns="0" tIns="0" rIns="0" bIns="0" rtlCol="0" anchor="ctr"/>
           <a:lstStyle/>
           <a:p>
-            <a:pPr algn="l" indent="0" marL="0">
+            <a:pPr marL="0" indent="0" algn="l">
               <a:buNone/>
             </a:pPr>
             <a:r>
@@ -12372,7 +12241,7 @@
           <a:bodyPr wrap="square" lIns="254" tIns="254" rIns="254" bIns="254" rtlCol="0" anchor="ctr"/>
           <a:lstStyle/>
           <a:p>
-            <a:pPr algn="ctr" indent="0" marL="0">
+            <a:pPr marL="0" indent="0" algn="ctr">
               <a:buNone/>
             </a:pPr>
             <a:r>
@@ -12389,7 +12258,7 @@
             <a:endParaRPr lang="en-US" sz="850" dirty="0"/>
           </a:p>
           <a:p>
-            <a:pPr algn="ctr" indent="0" marL="0">
+            <a:pPr marL="0" indent="0" algn="ctr">
               <a:buNone/>
             </a:pPr>
             <a:r>
@@ -12455,7 +12324,7 @@
           <a:bodyPr wrap="square" lIns="254" tIns="254" rIns="254" bIns="254" rtlCol="0" anchor="ctr"/>
           <a:lstStyle/>
           <a:p>
-            <a:pPr algn="ctr" indent="0" marL="0">
+            <a:pPr marL="0" indent="0" algn="ctr">
               <a:buNone/>
             </a:pPr>
             <a:r>
@@ -12472,7 +12341,7 @@
             <a:endParaRPr lang="en-US" sz="850" dirty="0"/>
           </a:p>
           <a:p>
-            <a:pPr algn="ctr" indent="0" marL="0">
+            <a:pPr marL="0" indent="0" algn="ctr">
               <a:buNone/>
             </a:pPr>
             <a:r>
@@ -12582,7 +12451,7 @@
           <a:bodyPr wrap="square" lIns="381" tIns="381" rIns="381" bIns="381" rtlCol="0" anchor="ctr"/>
           <a:lstStyle/>
           <a:p>
-            <a:pPr algn="ctr" indent="0" marL="0">
+            <a:pPr marL="0" indent="0" algn="ctr">
               <a:buNone/>
             </a:pPr>
             <a:r>
@@ -12648,7 +12517,7 @@
           <a:bodyPr wrap="square" lIns="254" tIns="254" rIns="254" bIns="254" rtlCol="0" anchor="ctr"/>
           <a:lstStyle/>
           <a:p>
-            <a:pPr algn="ctr" indent="0" marL="0">
+            <a:pPr marL="0" indent="0" algn="ctr">
               <a:buNone/>
             </a:pPr>
             <a:r>
@@ -12665,7 +12534,7 @@
             <a:endParaRPr lang="en-US" sz="850" dirty="0"/>
           </a:p>
           <a:p>
-            <a:pPr algn="ctr" indent="0" marL="0">
+            <a:pPr marL="0" indent="0" algn="ctr">
               <a:buNone/>
             </a:pPr>
             <a:r>
@@ -12729,7 +12598,7 @@
           <a:bodyPr wrap="square" lIns="254" tIns="254" rIns="254" bIns="254" rtlCol="0" anchor="ctr"/>
           <a:lstStyle/>
           <a:p>
-            <a:pPr algn="ctr" indent="0" marL="0">
+            <a:pPr marL="0" indent="0" algn="ctr">
               <a:buNone/>
             </a:pPr>
             <a:r>
@@ -12864,7 +12733,7 @@
           <a:bodyPr wrap="square" lIns="0" tIns="0" rIns="0" bIns="0" rtlCol="0" anchor="ctr"/>
           <a:lstStyle/>
           <a:p>
-            <a:pPr algn="ctr" indent="0" marL="0">
+            <a:pPr marL="0" indent="0" algn="ctr">
               <a:buNone/>
             </a:pPr>
             <a:r>
@@ -12927,7 +12796,7 @@
           <a:bodyPr wrap="square" lIns="0" tIns="0" rIns="0" bIns="0" rtlCol="0" anchor="ctr"/>
           <a:lstStyle/>
           <a:p>
-            <a:pPr algn="ctr" indent="0" marL="0">
+            <a:pPr marL="0" indent="0" algn="ctr">
               <a:buNone/>
             </a:pPr>
             <a:r>
@@ -13037,7 +12906,7 @@
           <a:bodyPr wrap="square" lIns="381" tIns="381" rIns="381" bIns="381" rtlCol="0" anchor="ctr"/>
           <a:lstStyle/>
           <a:p>
-            <a:pPr algn="ctr" indent="0" marL="0">
+            <a:pPr marL="0" indent="0" algn="ctr">
               <a:buNone/>
             </a:pPr>
             <a:r>
@@ -13100,7 +12969,7 @@
           <a:bodyPr wrap="square" lIns="0" tIns="0" rIns="0" bIns="0" rtlCol="0" anchor="t"/>
           <a:lstStyle/>
           <a:p>
-            <a:pPr indent="0" marL="0">
+            <a:pPr marL="0" indent="0">
               <a:buNone/>
             </a:pPr>
             <a:r>
@@ -13114,9 +12983,6 @@
               </a:rPr>
               <a:t>Figure: </a:t>
             </a:r>
-            <a:pPr indent="0" marL="0">
-              <a:buNone/>
-            </a:pPr>
             <a:r>
               <a:rPr lang="en-US" sz="850" dirty="0">
                 <a:solidFill>
@@ -13178,7 +13044,7 @@
           <a:bodyPr wrap="square" lIns="0" tIns="0" rIns="0" bIns="0" rtlCol="0" anchor="ctr"/>
           <a:lstStyle/>
           <a:p>
-            <a:pPr algn="ctr" indent="0" marL="0">
+            <a:pPr marL="0" indent="0" algn="ctr">
               <a:buNone/>
             </a:pPr>
             <a:r>
@@ -13190,21 +13056,7 @@
                 <a:ea typeface="PT Sans" pitchFamily="34" charset="-122"/>
                 <a:cs typeface="PT Sans" pitchFamily="34" charset="-120"/>
               </a:rPr>
-              <a:t>AIORI 3</a:t>
-            </a:r>
-            <a:pPr algn="ctr" indent="0" marL="0">
-              <a:buNone/>
-            </a:pPr>
-            <a:r>
-              <a:rPr lang="en-US" sz="750" b="1" dirty="0">
-                <a:solidFill>
-                  <a:srgbClr val="0000DC"/>
-                </a:solidFill>
-                <a:latin typeface="PT Sans" pitchFamily="34" charset="0"/>
-                <a:ea typeface="PT Sans" pitchFamily="34" charset="-122"/>
-                <a:cs typeface="PT Sans" pitchFamily="34" charset="-120"/>
-              </a:rPr>
-              <a:t>      Deployment Timeline</a:t>
+              <a:t>AIORI 3      Deployment Timeline</a:t>
             </a:r>
             <a:endParaRPr lang="en-US" sz="750" dirty="0"/>
           </a:p>
@@ -13231,7 +13083,7 @@
           <a:bodyPr wrap="square" lIns="0" tIns="0" rIns="0" bIns="0" rtlCol="0" anchor="ctr"/>
           <a:lstStyle/>
           <a:p>
-            <a:pPr indent="0" marL="0">
+            <a:pPr marL="0" indent="0">
               <a:buNone/>
             </a:pPr>
             <a:r>
@@ -13270,7 +13122,7 @@
           <a:bodyPr wrap="square" lIns="0" tIns="0" rIns="0" bIns="0" rtlCol="0" anchor="t"/>
           <a:lstStyle/>
           <a:p>
-            <a:pPr indent="0" marL="0">
+            <a:pPr marL="0" indent="0">
               <a:buNone/>
             </a:pPr>
             <a:r>
@@ -13309,7 +13161,7 @@
           <a:bodyPr wrap="square" lIns="0" tIns="0" rIns="0" bIns="0" rtlCol="0" anchor="ctr"/>
           <a:lstStyle/>
           <a:p>
-            <a:pPr indent="0" marL="0">
+            <a:pPr marL="0" indent="0">
               <a:buNone/>
             </a:pPr>
             <a:r>
@@ -13323,9 +13175,6 @@
               </a:rPr>
               <a:t>D. Grace T T • </a:t>
             </a:r>
-            <a:pPr indent="0" marL="0">
-              <a:buNone/>
-            </a:pPr>
             <a:r>
               <a:rPr lang="en-US" sz="750" b="1" dirty="0">
                 <a:solidFill>
@@ -13337,9 +13186,6 @@
               </a:rPr>
               <a:t>A3-PS001-TC034</a:t>
             </a:r>
-            <a:pPr indent="0" marL="0">
-              <a:buNone/>
-            </a:pPr>
             <a:r>
               <a:rPr lang="en-US" sz="750" dirty="0">
                 <a:solidFill>
@@ -13376,7 +13222,7 @@
           <a:bodyPr wrap="square" lIns="0" tIns="0" rIns="0" bIns="0" rtlCol="0" anchor="ctr"/>
           <a:lstStyle/>
           <a:p>
-            <a:pPr algn="r" indent="0" marL="0">
+            <a:pPr marL="0" indent="0" algn="r">
               <a:buNone/>
             </a:pPr>
             <a:r>
@@ -13440,7 +13286,7 @@
           <a:bodyPr wrap="square" lIns="0" tIns="0" rIns="0" bIns="0" rtlCol="0" anchor="ctr"/>
           <a:lstStyle/>
           <a:p>
-            <a:pPr indent="0" marL="0">
+            <a:pPr marL="0" indent="0">
               <a:buNone/>
             </a:pPr>
             <a:r>
@@ -13504,7 +13350,7 @@
           <a:bodyPr wrap="square" lIns="0" tIns="0" rIns="0" bIns="0" rtlCol="0" anchor="ctr"/>
           <a:lstStyle/>
           <a:p>
-            <a:pPr indent="0" marL="0">
+            <a:pPr marL="0" indent="0">
               <a:buNone/>
             </a:pPr>
             <a:r>
@@ -13543,7 +13389,7 @@
           <a:bodyPr wrap="square" lIns="0" tIns="0" rIns="0" bIns="0" rtlCol="0" anchor="t"/>
           <a:lstStyle/>
           <a:p>
-            <a:pPr indent="0" marL="0">
+            <a:pPr marL="0" indent="0">
               <a:buNone/>
             </a:pPr>
             <a:r>
@@ -13582,7 +13428,7 @@
           <a:bodyPr wrap="square" lIns="0" tIns="0" rIns="0" bIns="0" rtlCol="0" anchor="t"/>
           <a:lstStyle/>
           <a:p>
-            <a:pPr indent="0" marL="0">
+            <a:pPr marL="0" indent="0">
               <a:buNone/>
             </a:pPr>
             <a:r>
@@ -13596,9 +13442,6 @@
               </a:rPr>
               <a:t>Exit: </a:t>
             </a:r>
-            <a:pPr indent="0" marL="0">
-              <a:buNone/>
-            </a:pPr>
             <a:r>
               <a:rPr lang="en-US" sz="800" dirty="0">
                 <a:solidFill>
@@ -13662,7 +13505,7 @@
           <a:bodyPr wrap="square" lIns="0" tIns="0" rIns="0" bIns="0" rtlCol="0" anchor="ctr"/>
           <a:lstStyle/>
           <a:p>
-            <a:pPr algn="ctr" indent="0" marL="0">
+            <a:pPr marL="0" indent="0" algn="ctr">
               <a:buNone/>
             </a:pPr>
             <a:r>
@@ -13726,7 +13569,7 @@
           <a:bodyPr wrap="square" lIns="0" tIns="0" rIns="0" bIns="0" rtlCol="0" anchor="ctr"/>
           <a:lstStyle/>
           <a:p>
-            <a:pPr indent="0" marL="0">
+            <a:pPr marL="0" indent="0">
               <a:buNone/>
             </a:pPr>
             <a:r>
@@ -13790,7 +13633,7 @@
           <a:bodyPr wrap="square" lIns="0" tIns="0" rIns="0" bIns="0" rtlCol="0" anchor="ctr"/>
           <a:lstStyle/>
           <a:p>
-            <a:pPr indent="0" marL="0">
+            <a:pPr marL="0" indent="0">
               <a:buNone/>
             </a:pPr>
             <a:r>
@@ -13829,7 +13672,7 @@
           <a:bodyPr wrap="square" lIns="0" tIns="0" rIns="0" bIns="0" rtlCol="0" anchor="t"/>
           <a:lstStyle/>
           <a:p>
-            <a:pPr indent="0" marL="0">
+            <a:pPr marL="0" indent="0">
               <a:buNone/>
             </a:pPr>
             <a:r>
@@ -13868,7 +13711,7 @@
           <a:bodyPr wrap="square" lIns="0" tIns="0" rIns="0" bIns="0" rtlCol="0" anchor="t"/>
           <a:lstStyle/>
           <a:p>
-            <a:pPr indent="0" marL="0">
+            <a:pPr marL="0" indent="0">
               <a:buNone/>
             </a:pPr>
             <a:r>
@@ -13882,9 +13725,6 @@
               </a:rPr>
               <a:t>Exit: </a:t>
             </a:r>
-            <a:pPr indent="0" marL="0">
-              <a:buNone/>
-            </a:pPr>
             <a:r>
               <a:rPr lang="en-US" sz="800" dirty="0">
                 <a:solidFill>
@@ -13948,7 +13788,7 @@
           <a:bodyPr wrap="square" lIns="0" tIns="0" rIns="0" bIns="0" rtlCol="0" anchor="ctr"/>
           <a:lstStyle/>
           <a:p>
-            <a:pPr algn="ctr" indent="0" marL="0">
+            <a:pPr marL="0" indent="0" algn="ctr">
               <a:buNone/>
             </a:pPr>
             <a:r>
@@ -14012,7 +13852,7 @@
           <a:bodyPr wrap="square" lIns="0" tIns="0" rIns="0" bIns="0" rtlCol="0" anchor="ctr"/>
           <a:lstStyle/>
           <a:p>
-            <a:pPr indent="0" marL="0">
+            <a:pPr marL="0" indent="0">
               <a:buNone/>
             </a:pPr>
             <a:r>
@@ -14076,7 +13916,7 @@
           <a:bodyPr wrap="square" lIns="0" tIns="0" rIns="0" bIns="0" rtlCol="0" anchor="ctr"/>
           <a:lstStyle/>
           <a:p>
-            <a:pPr indent="0" marL="0">
+            <a:pPr marL="0" indent="0">
               <a:buNone/>
             </a:pPr>
             <a:r>
@@ -14115,7 +13955,7 @@
           <a:bodyPr wrap="square" lIns="0" tIns="0" rIns="0" bIns="0" rtlCol="0" anchor="t"/>
           <a:lstStyle/>
           <a:p>
-            <a:pPr indent="0" marL="0">
+            <a:pPr marL="0" indent="0">
               <a:buNone/>
             </a:pPr>
             <a:r>
@@ -14154,7 +13994,7 @@
           <a:bodyPr wrap="square" lIns="0" tIns="0" rIns="0" bIns="0" rtlCol="0" anchor="t"/>
           <a:lstStyle/>
           <a:p>
-            <a:pPr indent="0" marL="0">
+            <a:pPr marL="0" indent="0">
               <a:buNone/>
             </a:pPr>
             <a:r>
@@ -14168,9 +14008,6 @@
               </a:rPr>
               <a:t>Exit: </a:t>
             </a:r>
-            <a:pPr indent="0" marL="0">
-              <a:buNone/>
-            </a:pPr>
             <a:r>
               <a:rPr lang="en-US" sz="800" dirty="0">
                 <a:solidFill>
@@ -14234,7 +14071,7 @@
           <a:bodyPr wrap="square" lIns="0" tIns="0" rIns="0" bIns="0" rtlCol="0" anchor="ctr"/>
           <a:lstStyle/>
           <a:p>
-            <a:pPr algn="ctr" indent="0" marL="0">
+            <a:pPr marL="0" indent="0" algn="ctr">
               <a:buNone/>
             </a:pPr>
             <a:r>
@@ -14298,7 +14135,7 @@
           <a:bodyPr wrap="square" lIns="0" tIns="0" rIns="0" bIns="0" rtlCol="0" anchor="ctr"/>
           <a:lstStyle/>
           <a:p>
-            <a:pPr indent="0" marL="0">
+            <a:pPr marL="0" indent="0">
               <a:buNone/>
             </a:pPr>
             <a:r>
@@ -14362,7 +14199,7 @@
           <a:bodyPr wrap="square" lIns="0" tIns="0" rIns="0" bIns="0" rtlCol="0" anchor="ctr"/>
           <a:lstStyle/>
           <a:p>
-            <a:pPr indent="0" marL="0">
+            <a:pPr marL="0" indent="0">
               <a:buNone/>
             </a:pPr>
             <a:r>
@@ -14401,7 +14238,7 @@
           <a:bodyPr wrap="square" lIns="0" tIns="0" rIns="0" bIns="0" rtlCol="0" anchor="t"/>
           <a:lstStyle/>
           <a:p>
-            <a:pPr indent="0" marL="0">
+            <a:pPr marL="0" indent="0">
               <a:buNone/>
             </a:pPr>
             <a:r>
@@ -14440,7 +14277,7 @@
           <a:bodyPr wrap="square" lIns="0" tIns="0" rIns="0" bIns="0" rtlCol="0" anchor="t"/>
           <a:lstStyle/>
           <a:p>
-            <a:pPr indent="0" marL="0">
+            <a:pPr marL="0" indent="0">
               <a:buNone/>
             </a:pPr>
             <a:r>
@@ -14454,9 +14291,6 @@
               </a:rPr>
               <a:t>Exit: </a:t>
             </a:r>
-            <a:pPr indent="0" marL="0">
-              <a:buNone/>
-            </a:pPr>
             <a:r>
               <a:rPr lang="en-US" sz="800" dirty="0">
                 <a:solidFill>
@@ -14520,7 +14354,7 @@
           <a:bodyPr wrap="square" lIns="0" tIns="0" rIns="0" bIns="0" rtlCol="0" anchor="ctr"/>
           <a:lstStyle/>
           <a:p>
-            <a:pPr algn="ctr" indent="0" marL="0">
+            <a:pPr marL="0" indent="0" algn="ctr">
               <a:buNone/>
             </a:pPr>
             <a:r>
@@ -14584,7 +14418,7 @@
           <a:bodyPr wrap="square" lIns="0" tIns="0" rIns="0" bIns="0" rtlCol="0" anchor="ctr"/>
           <a:lstStyle/>
           <a:p>
-            <a:pPr indent="0" marL="0">
+            <a:pPr marL="0" indent="0">
               <a:buNone/>
             </a:pPr>
             <a:r>
@@ -14648,7 +14482,7 @@
           <a:bodyPr wrap="square" lIns="0" tIns="0" rIns="0" bIns="0" rtlCol="0" anchor="ctr"/>
           <a:lstStyle/>
           <a:p>
-            <a:pPr indent="0" marL="0">
+            <a:pPr marL="0" indent="0">
               <a:buNone/>
             </a:pPr>
             <a:r>
@@ -14687,7 +14521,7 @@
           <a:bodyPr wrap="square" lIns="0" tIns="0" rIns="0" bIns="0" rtlCol="0" anchor="t"/>
           <a:lstStyle/>
           <a:p>
-            <a:pPr indent="0" marL="0">
+            <a:pPr marL="0" indent="0">
               <a:buNone/>
             </a:pPr>
             <a:r>
@@ -14726,7 +14560,7 @@
           <a:bodyPr wrap="square" lIns="0" tIns="0" rIns="0" bIns="0" rtlCol="0" anchor="t"/>
           <a:lstStyle/>
           <a:p>
-            <a:pPr indent="0" marL="0">
+            <a:pPr marL="0" indent="0">
               <a:buNone/>
             </a:pPr>
             <a:r>
@@ -14740,9 +14574,6 @@
               </a:rPr>
               <a:t>Exit: </a:t>
             </a:r>
-            <a:pPr indent="0" marL="0">
-              <a:buNone/>
-            </a:pPr>
             <a:r>
               <a:rPr lang="en-US" sz="800" dirty="0">
                 <a:solidFill>
@@ -14806,7 +14637,7 @@
           <a:bodyPr wrap="square" lIns="0" tIns="0" rIns="0" bIns="0" rtlCol="0" anchor="ctr"/>
           <a:lstStyle/>
           <a:p>
-            <a:pPr algn="ctr" indent="0" marL="0">
+            <a:pPr marL="0" indent="0" algn="ctr">
               <a:buNone/>
             </a:pPr>
             <a:r>
@@ -14870,7 +14701,7 @@
           <a:bodyPr wrap="square" lIns="0" tIns="0" rIns="0" bIns="0" rtlCol="0" anchor="ctr"/>
           <a:lstStyle/>
           <a:p>
-            <a:pPr indent="0" marL="0">
+            <a:pPr marL="0" indent="0">
               <a:buNone/>
             </a:pPr>
             <a:r>
@@ -14934,7 +14765,7 @@
           <a:bodyPr wrap="square" lIns="0" tIns="0" rIns="0" bIns="0" rtlCol="0" anchor="ctr"/>
           <a:lstStyle/>
           <a:p>
-            <a:pPr indent="0" marL="0">
+            <a:pPr marL="0" indent="0">
               <a:buNone/>
             </a:pPr>
             <a:r>
@@ -14973,7 +14804,7 @@
           <a:bodyPr wrap="square" lIns="0" tIns="0" rIns="0" bIns="0" rtlCol="0" anchor="t"/>
           <a:lstStyle/>
           <a:p>
-            <a:pPr indent="0" marL="0">
+            <a:pPr marL="0" indent="0">
               <a:buNone/>
             </a:pPr>
             <a:r>
@@ -15012,7 +14843,7 @@
           <a:bodyPr wrap="square" lIns="0" tIns="0" rIns="0" bIns="0" rtlCol="0" anchor="t"/>
           <a:lstStyle/>
           <a:p>
-            <a:pPr indent="0" marL="0">
+            <a:pPr marL="0" indent="0">
               <a:buNone/>
             </a:pPr>
             <a:r>
@@ -15026,9 +14857,6 @@
               </a:rPr>
               <a:t>Exit: </a:t>
             </a:r>
-            <a:pPr indent="0" marL="0">
-              <a:buNone/>
-            </a:pPr>
             <a:r>
               <a:rPr lang="en-US" sz="800" dirty="0">
                 <a:solidFill>
@@ -15092,7 +14920,7 @@
           <a:bodyPr wrap="square" lIns="0" tIns="0" rIns="0" bIns="0" rtlCol="0" anchor="ctr"/>
           <a:lstStyle/>
           <a:p>
-            <a:pPr algn="ctr" indent="0" marL="0">
+            <a:pPr marL="0" indent="0" algn="ctr">
               <a:buNone/>
             </a:pPr>
             <a:r>
@@ -15131,7 +14959,7 @@
           <a:bodyPr wrap="square" lIns="0" tIns="0" rIns="0" bIns="0" rtlCol="0" anchor="t"/>
           <a:lstStyle/>
           <a:p>
-            <a:pPr indent="0" marL="0">
+            <a:pPr marL="0" indent="0">
               <a:buNone/>
             </a:pPr>
             <a:r>
@@ -15145,9 +14973,6 @@
               </a:rPr>
               <a:t>Methodology: </a:t>
             </a:r>
-            <a:pPr indent="0" marL="0">
-              <a:buNone/>
-            </a:pPr>
             <a:r>
               <a:rPr lang="en-US" sz="900" dirty="0">
                 <a:solidFill>
@@ -15464,4 +15289,319 @@
     </a:ext>
   </a:extLst>
 </a:theme>
+</file>
+
+<file path=ppt/theme/theme2.xml><?xml version="1.0" encoding="utf-8"?>
+<a:theme xmlns:a="http://schemas.openxmlformats.org/drawingml/2006/main" name="Office Theme">
+  <a:themeElements>
+    <a:clrScheme name="Office">
+      <a:dk1>
+        <a:sysClr val="windowText" lastClr="000000"/>
+      </a:dk1>
+      <a:lt1>
+        <a:sysClr val="window" lastClr="FFFFFF"/>
+      </a:lt1>
+      <a:dk2>
+        <a:srgbClr val="0E2841"/>
+      </a:dk2>
+      <a:lt2>
+        <a:srgbClr val="E8E8E8"/>
+      </a:lt2>
+      <a:accent1>
+        <a:srgbClr val="156082"/>
+      </a:accent1>
+      <a:accent2>
+        <a:srgbClr val="E97132"/>
+      </a:accent2>
+      <a:accent3>
+        <a:srgbClr val="196B24"/>
+      </a:accent3>
+      <a:accent4>
+        <a:srgbClr val="0F9ED5"/>
+      </a:accent4>
+      <a:accent5>
+        <a:srgbClr val="A02B93"/>
+      </a:accent5>
+      <a:accent6>
+        <a:srgbClr val="4EA72E"/>
+      </a:accent6>
+      <a:hlink>
+        <a:srgbClr val="467886"/>
+      </a:hlink>
+      <a:folHlink>
+        <a:srgbClr val="96607D"/>
+      </a:folHlink>
+    </a:clrScheme>
+    <a:fontScheme name="Office">
+      <a:majorFont>
+        <a:latin typeface="Aptos Display" panose="02110004020202020204"/>
+        <a:ea typeface=""/>
+        <a:cs typeface=""/>
+        <a:font script="Jpan" typeface="游ゴシック Light"/>
+        <a:font script="Hang" typeface="맑은 고딕"/>
+        <a:font script="Hans" typeface="等线 Light"/>
+        <a:font script="Hant" typeface="新細明體"/>
+        <a:font script="Arab" typeface="Times New Roman"/>
+        <a:font script="Hebr" typeface="Times New Roman"/>
+        <a:font script="Thai" typeface="Angsana New"/>
+        <a:font script="Ethi" typeface="Nyala"/>
+        <a:font script="Beng" typeface="Vrinda"/>
+        <a:font script="Gujr" typeface="Shruti"/>
+        <a:font script="Khmr" typeface="MoolBoran"/>
+        <a:font script="Knda" typeface="Tunga"/>
+        <a:font script="Guru" typeface="Raavi"/>
+        <a:font script="Cans" typeface="Euphemia"/>
+        <a:font script="Cher" typeface="Plantagenet Cherokee"/>
+        <a:font script="Yiii" typeface="Microsoft Yi Baiti"/>
+        <a:font script="Tibt" typeface="Microsoft Himalaya"/>
+        <a:font script="Thaa" typeface="MV Boli"/>
+        <a:font script="Deva" typeface="Mangal"/>
+        <a:font script="Telu" typeface="Gautami"/>
+        <a:font script="Taml" typeface="Latha"/>
+        <a:font script="Syrc" typeface="Estrangelo Edessa"/>
+        <a:font script="Orya" typeface="Kalinga"/>
+        <a:font script="Mlym" typeface="Kartika"/>
+        <a:font script="Laoo" typeface="DokChampa"/>
+        <a:font script="Sinh" typeface="Iskoola Pota"/>
+        <a:font script="Mong" typeface="Mongolian Baiti"/>
+        <a:font script="Viet" typeface="Times New Roman"/>
+        <a:font script="Uigh" typeface="Microsoft Uighur"/>
+        <a:font script="Geor" typeface="Sylfaen"/>
+        <a:font script="Armn" typeface="Arial"/>
+        <a:font script="Bugi" typeface="Leelawadee UI"/>
+        <a:font script="Bopo" typeface="Microsoft JhengHei"/>
+        <a:font script="Java" typeface="Javanese Text"/>
+        <a:font script="Lisu" typeface="Segoe UI"/>
+        <a:font script="Mymr" typeface="Myanmar Text"/>
+        <a:font script="Nkoo" typeface="Ebrima"/>
+        <a:font script="Olck" typeface="Nirmala UI"/>
+        <a:font script="Osma" typeface="Ebrima"/>
+        <a:font script="Phag" typeface="Phagspa"/>
+        <a:font script="Syrn" typeface="Estrangelo Edessa"/>
+        <a:font script="Syrj" typeface="Estrangelo Edessa"/>
+        <a:font script="Syre" typeface="Estrangelo Edessa"/>
+        <a:font script="Sora" typeface="Nirmala UI"/>
+        <a:font script="Tale" typeface="Microsoft Tai Le"/>
+        <a:font script="Talu" typeface="Microsoft New Tai Lue"/>
+        <a:font script="Tfng" typeface="Ebrima"/>
+      </a:majorFont>
+      <a:minorFont>
+        <a:latin typeface="Aptos" panose="02110004020202020204"/>
+        <a:ea typeface=""/>
+        <a:cs typeface=""/>
+        <a:font script="Jpan" typeface="游ゴシック"/>
+        <a:font script="Hang" typeface="맑은 고딕"/>
+        <a:font script="Hans" typeface="等线"/>
+        <a:font script="Hant" typeface="新細明體"/>
+        <a:font script="Arab" typeface="Arial"/>
+        <a:font script="Hebr" typeface="Arial"/>
+        <a:font script="Thai" typeface="Cordia New"/>
+        <a:font script="Ethi" typeface="Nyala"/>
+        <a:font script="Beng" typeface="Vrinda"/>
+        <a:font script="Gujr" typeface="Shruti"/>
+        <a:font script="Khmr" typeface="DaunPenh"/>
+        <a:font script="Knda" typeface="Tunga"/>
+        <a:font script="Guru" typeface="Raavi"/>
+        <a:font script="Cans" typeface="Euphemia"/>
+        <a:font script="Cher" typeface="Plantagenet Cherokee"/>
+        <a:font script="Yiii" typeface="Microsoft Yi Baiti"/>
+        <a:font script="Tibt" typeface="Microsoft Himalaya"/>
+        <a:font script="Thaa" typeface="MV Boli"/>
+        <a:font script="Deva" typeface="Mangal"/>
+        <a:font script="Telu" typeface="Gautami"/>
+        <a:font script="Taml" typeface="Latha"/>
+        <a:font script="Syrc" typeface="Estrangelo Edessa"/>
+        <a:font script="Orya" typeface="Kalinga"/>
+        <a:font script="Mlym" typeface="Kartika"/>
+        <a:font script="Laoo" typeface="DokChampa"/>
+        <a:font script="Sinh" typeface="Iskoola Pota"/>
+        <a:font script="Mong" typeface="Mongolian Baiti"/>
+        <a:font script="Viet" typeface="Arial"/>
+        <a:font script="Uigh" typeface="Microsoft Uighur"/>
+        <a:font script="Geor" typeface="Sylfaen"/>
+        <a:font script="Armn" typeface="Arial"/>
+        <a:font script="Bugi" typeface="Leelawadee UI"/>
+        <a:font script="Bopo" typeface="Microsoft JhengHei"/>
+        <a:font script="Java" typeface="Javanese Text"/>
+        <a:font script="Lisu" typeface="Segoe UI"/>
+        <a:font script="Mymr" typeface="Myanmar Text"/>
+        <a:font script="Nkoo" typeface="Ebrima"/>
+        <a:font script="Olck" typeface="Nirmala UI"/>
+        <a:font script="Osma" typeface="Ebrima"/>
+        <a:font script="Phag" typeface="Phagspa"/>
+        <a:font script="Syrn" typeface="Estrangelo Edessa"/>
+        <a:font script="Syrj" typeface="Estrangelo Edessa"/>
+        <a:font script="Syre" typeface="Estrangelo Edessa"/>
+        <a:font script="Sora" typeface="Nirmala UI"/>
+        <a:font script="Tale" typeface="Microsoft Tai Le"/>
+        <a:font script="Talu" typeface="Microsoft New Tai Lue"/>
+        <a:font script="Tfng" typeface="Ebrima"/>
+      </a:minorFont>
+    </a:fontScheme>
+    <a:fmtScheme name="Office">
+      <a:fillStyleLst>
+        <a:solidFill>
+          <a:schemeClr val="phClr"/>
+        </a:solidFill>
+        <a:gradFill rotWithShape="1">
+          <a:gsLst>
+            <a:gs pos="0">
+              <a:schemeClr val="phClr">
+                <a:lumMod val="110000"/>
+                <a:satMod val="105000"/>
+                <a:tint val="67000"/>
+              </a:schemeClr>
+            </a:gs>
+            <a:gs pos="50000">
+              <a:schemeClr val="phClr">
+                <a:lumMod val="105000"/>
+                <a:satMod val="103000"/>
+                <a:tint val="73000"/>
+              </a:schemeClr>
+            </a:gs>
+            <a:gs pos="100000">
+              <a:schemeClr val="phClr">
+                <a:lumMod val="105000"/>
+                <a:satMod val="109000"/>
+                <a:tint val="81000"/>
+              </a:schemeClr>
+            </a:gs>
+          </a:gsLst>
+          <a:lin ang="5400000" scaled="0"/>
+        </a:gradFill>
+        <a:gradFill rotWithShape="1">
+          <a:gsLst>
+            <a:gs pos="0">
+              <a:schemeClr val="phClr">
+                <a:satMod val="103000"/>
+                <a:lumMod val="102000"/>
+                <a:tint val="94000"/>
+              </a:schemeClr>
+            </a:gs>
+            <a:gs pos="50000">
+              <a:schemeClr val="phClr">
+                <a:satMod val="110000"/>
+                <a:lumMod val="100000"/>
+                <a:shade val="100000"/>
+              </a:schemeClr>
+            </a:gs>
+            <a:gs pos="100000">
+              <a:schemeClr val="phClr">
+                <a:lumMod val="99000"/>
+                <a:satMod val="120000"/>
+                <a:shade val="78000"/>
+              </a:schemeClr>
+            </a:gs>
+          </a:gsLst>
+          <a:lin ang="5400000" scaled="0"/>
+        </a:gradFill>
+      </a:fillStyleLst>
+      <a:lnStyleLst>
+        <a:ln w="12700" cap="flat" cmpd="sng" algn="ctr">
+          <a:solidFill>
+            <a:schemeClr val="phClr"/>
+          </a:solidFill>
+          <a:prstDash val="solid"/>
+          <a:miter lim="800000"/>
+        </a:ln>
+        <a:ln w="19050" cap="flat" cmpd="sng" algn="ctr">
+          <a:solidFill>
+            <a:schemeClr val="phClr"/>
+          </a:solidFill>
+          <a:prstDash val="solid"/>
+          <a:miter lim="800000"/>
+        </a:ln>
+        <a:ln w="25400" cap="flat" cmpd="sng" algn="ctr">
+          <a:solidFill>
+            <a:schemeClr val="phClr"/>
+          </a:solidFill>
+          <a:prstDash val="solid"/>
+          <a:miter lim="800000"/>
+        </a:ln>
+      </a:lnStyleLst>
+      <a:effectStyleLst>
+        <a:effectStyle>
+          <a:effectLst/>
+        </a:effectStyle>
+        <a:effectStyle>
+          <a:effectLst/>
+        </a:effectStyle>
+        <a:effectStyle>
+          <a:effectLst>
+            <a:outerShdw blurRad="57150" dist="19050" dir="5400000" algn="ctr" rotWithShape="0">
+              <a:srgbClr val="000000">
+                <a:alpha val="63000"/>
+              </a:srgbClr>
+            </a:outerShdw>
+          </a:effectLst>
+        </a:effectStyle>
+      </a:effectStyleLst>
+      <a:bgFillStyleLst>
+        <a:solidFill>
+          <a:schemeClr val="phClr"/>
+        </a:solidFill>
+        <a:solidFill>
+          <a:schemeClr val="phClr">
+            <a:tint val="95000"/>
+            <a:satMod val="170000"/>
+          </a:schemeClr>
+        </a:solidFill>
+        <a:gradFill rotWithShape="1">
+          <a:gsLst>
+            <a:gs pos="0">
+              <a:schemeClr val="phClr">
+                <a:tint val="93000"/>
+                <a:satMod val="150000"/>
+                <a:shade val="98000"/>
+                <a:lumMod val="102000"/>
+              </a:schemeClr>
+            </a:gs>
+            <a:gs pos="50000">
+              <a:schemeClr val="phClr">
+                <a:tint val="98000"/>
+                <a:satMod val="130000"/>
+                <a:shade val="90000"/>
+                <a:lumMod val="103000"/>
+              </a:schemeClr>
+            </a:gs>
+            <a:gs pos="100000">
+              <a:schemeClr val="phClr">
+                <a:shade val="63000"/>
+                <a:satMod val="120000"/>
+              </a:schemeClr>
+            </a:gs>
+          </a:gsLst>
+          <a:lin ang="5400000" scaled="0"/>
+        </a:gradFill>
+      </a:bgFillStyleLst>
+    </a:fmtScheme>
+  </a:themeElements>
+  <a:objectDefaults>
+    <a:lnDef>
+      <a:spPr/>
+      <a:bodyPr/>
+      <a:lstStyle/>
+      <a:style>
+        <a:lnRef idx="2">
+          <a:schemeClr val="accent1"/>
+        </a:lnRef>
+        <a:fillRef idx="0">
+          <a:schemeClr val="accent1"/>
+        </a:fillRef>
+        <a:effectRef idx="1">
+          <a:schemeClr val="accent1"/>
+        </a:effectRef>
+        <a:fontRef idx="minor">
+          <a:schemeClr val="tx1"/>
+        </a:fontRef>
+      </a:style>
+    </a:lnDef>
+  </a:objectDefaults>
+  <a:extraClrSchemeLst/>
+  <a:extLst>
+    <a:ext uri="{05A4C25C-085E-4340-85A3-A5531E510DB2}">
+      <thm15:themeFamily xmlns:thm15="http://schemas.microsoft.com/office/thememl/2012/main" name="Office Theme" id="{2E142A2C-CD16-42D6-873A-C26D2A0506FA}" vid="{1BDDFF52-6CD6-40A5-AB3C-68EB2F1E4D0A}"/>
+    </a:ext>
+  </a:extLst>
+</a:theme>
 </file>